--- a/docs/pptx/entire/ritu-entire-linsubhr-ratio-sideeffect_10pct.pptx
+++ b/docs/pptx/entire/ritu-entire-linsubhr-ratio-sideeffect_10pct.pptx
@@ -3433,584 +3433,584 @@
           <p:spPr>
             <a:xfrm>
               <a:off x="1172049" y="2073503"/>
-              <a:ext cx="7090630" cy="3360695"/>
+              <a:ext cx="7090630" cy="3362485"/>
             </a:xfrm>
             <a:custGeom>
               <a:avLst/>
               <a:pathLst>
-                <a:path w="7090630" h="3360695">
+                <a:path w="7090630" h="3362485">
                   <a:moveTo>
-                    <a:pt x="652728" y="0"/>
+                    <a:pt x="673984" y="0"/>
                   </a:moveTo>
                   <a:lnTo>
-                    <a:pt x="716225" y="113230"/>
-                  </a:lnTo>
-                  <a:lnTo>
-                    <a:pt x="787847" y="236289"/>
-                  </a:lnTo>
-                  <a:lnTo>
-                    <a:pt x="859470" y="354855"/>
-                  </a:lnTo>
-                  <a:lnTo>
-                    <a:pt x="931092" y="469091"/>
-                  </a:lnTo>
-                  <a:lnTo>
-                    <a:pt x="1002715" y="579157"/>
-                  </a:lnTo>
-                  <a:lnTo>
-                    <a:pt x="1074337" y="685205"/>
-                  </a:lnTo>
-                  <a:lnTo>
-                    <a:pt x="1145960" y="787380"/>
-                  </a:lnTo>
-                  <a:lnTo>
-                    <a:pt x="1217582" y="885825"/>
-                  </a:lnTo>
-                  <a:lnTo>
-                    <a:pt x="1289205" y="980676"/>
-                  </a:lnTo>
-                  <a:lnTo>
-                    <a:pt x="1360827" y="1072064"/>
-                  </a:lnTo>
-                  <a:lnTo>
-                    <a:pt x="1432450" y="1160115"/>
-                  </a:lnTo>
-                  <a:lnTo>
-                    <a:pt x="1504073" y="1244952"/>
-                  </a:lnTo>
-                  <a:lnTo>
-                    <a:pt x="1575695" y="1326691"/>
-                  </a:lnTo>
-                  <a:lnTo>
-                    <a:pt x="1647318" y="1405445"/>
-                  </a:lnTo>
-                  <a:lnTo>
-                    <a:pt x="1718940" y="1481325"/>
-                  </a:lnTo>
-                  <a:lnTo>
-                    <a:pt x="1790563" y="1554434"/>
-                  </a:lnTo>
-                  <a:lnTo>
-                    <a:pt x="1862185" y="1624873"/>
-                  </a:lnTo>
-                  <a:lnTo>
-                    <a:pt x="1933808" y="1692741"/>
-                  </a:lnTo>
-                  <a:lnTo>
-                    <a:pt x="2005430" y="1758132"/>
-                  </a:lnTo>
-                  <a:lnTo>
-                    <a:pt x="2077053" y="1821134"/>
-                  </a:lnTo>
-                  <a:lnTo>
-                    <a:pt x="2148675" y="1881837"/>
-                  </a:lnTo>
-                  <a:lnTo>
-                    <a:pt x="2220298" y="1940323"/>
-                  </a:lnTo>
-                  <a:lnTo>
-                    <a:pt x="2291920" y="1996674"/>
-                  </a:lnTo>
-                  <a:lnTo>
-                    <a:pt x="2363543" y="2050967"/>
-                  </a:lnTo>
-                  <a:lnTo>
-                    <a:pt x="2435165" y="2103278"/>
-                  </a:lnTo>
-                  <a:lnTo>
-                    <a:pt x="2506788" y="2153680"/>
-                  </a:lnTo>
-                  <a:lnTo>
-                    <a:pt x="2578410" y="2202241"/>
-                  </a:lnTo>
-                  <a:lnTo>
-                    <a:pt x="2650033" y="2249029"/>
-                  </a:lnTo>
-                  <a:lnTo>
-                    <a:pt x="2721655" y="2294109"/>
-                  </a:lnTo>
-                  <a:lnTo>
-                    <a:pt x="2793278" y="2337543"/>
-                  </a:lnTo>
-                  <a:lnTo>
-                    <a:pt x="2864901" y="2379391"/>
-                  </a:lnTo>
-                  <a:lnTo>
-                    <a:pt x="2936523" y="2419711"/>
-                  </a:lnTo>
-                  <a:lnTo>
-                    <a:pt x="3008146" y="2458560"/>
-                  </a:lnTo>
-                  <a:lnTo>
-                    <a:pt x="3079768" y="2495989"/>
-                  </a:lnTo>
-                  <a:lnTo>
-                    <a:pt x="3151391" y="2532053"/>
-                  </a:lnTo>
-                  <a:lnTo>
-                    <a:pt x="3223013" y="2566799"/>
-                  </a:lnTo>
-                  <a:lnTo>
-                    <a:pt x="3294636" y="2600277"/>
-                  </a:lnTo>
-                  <a:lnTo>
-                    <a:pt x="3366258" y="2632533"/>
-                  </a:lnTo>
-                  <a:lnTo>
-                    <a:pt x="3437881" y="2658812"/>
-                  </a:lnTo>
-                  <a:lnTo>
-                    <a:pt x="3509503" y="2673535"/>
-                  </a:lnTo>
-                  <a:lnTo>
-                    <a:pt x="3581126" y="2687994"/>
-                  </a:lnTo>
-                  <a:lnTo>
-                    <a:pt x="3652748" y="2702195"/>
-                  </a:lnTo>
-                  <a:lnTo>
-                    <a:pt x="3724371" y="2716143"/>
-                  </a:lnTo>
-                  <a:lnTo>
-                    <a:pt x="3795993" y="2729842"/>
-                  </a:lnTo>
-                  <a:lnTo>
-                    <a:pt x="3867616" y="2743297"/>
-                  </a:lnTo>
-                  <a:lnTo>
-                    <a:pt x="3939238" y="2756511"/>
-                  </a:lnTo>
-                  <a:lnTo>
-                    <a:pt x="4010861" y="2769490"/>
-                  </a:lnTo>
-                  <a:lnTo>
-                    <a:pt x="4082483" y="2782236"/>
-                  </a:lnTo>
-                  <a:lnTo>
-                    <a:pt x="4154106" y="2794756"/>
-                  </a:lnTo>
-                  <a:lnTo>
-                    <a:pt x="4225729" y="2807052"/>
-                  </a:lnTo>
-                  <a:lnTo>
-                    <a:pt x="4297351" y="2819128"/>
-                  </a:lnTo>
-                  <a:lnTo>
-                    <a:pt x="4368974" y="2830990"/>
-                  </a:lnTo>
-                  <a:lnTo>
-                    <a:pt x="4440596" y="2842639"/>
-                  </a:lnTo>
-                  <a:lnTo>
-                    <a:pt x="4512219" y="2854080"/>
-                  </a:lnTo>
-                  <a:lnTo>
-                    <a:pt x="4583841" y="2865318"/>
-                  </a:lnTo>
-                  <a:lnTo>
-                    <a:pt x="4655464" y="2876354"/>
-                  </a:lnTo>
-                  <a:lnTo>
-                    <a:pt x="4727086" y="2887194"/>
-                  </a:lnTo>
-                  <a:lnTo>
-                    <a:pt x="4798709" y="2897841"/>
-                  </a:lnTo>
-                  <a:lnTo>
-                    <a:pt x="4870331" y="2908297"/>
-                  </a:lnTo>
-                  <a:lnTo>
-                    <a:pt x="4941954" y="2918567"/>
-                  </a:lnTo>
-                  <a:lnTo>
-                    <a:pt x="5013576" y="2928653"/>
-                  </a:lnTo>
-                  <a:lnTo>
-                    <a:pt x="5085199" y="2938559"/>
-                  </a:lnTo>
-                  <a:lnTo>
-                    <a:pt x="5156821" y="2948289"/>
-                  </a:lnTo>
-                  <a:lnTo>
-                    <a:pt x="5228444" y="2957845"/>
-                  </a:lnTo>
-                  <a:lnTo>
-                    <a:pt x="5300066" y="2967231"/>
-                  </a:lnTo>
-                  <a:lnTo>
-                    <a:pt x="5371689" y="2976448"/>
-                  </a:lnTo>
-                  <a:lnTo>
-                    <a:pt x="5443311" y="2985502"/>
-                  </a:lnTo>
-                  <a:lnTo>
-                    <a:pt x="5514934" y="2994394"/>
-                  </a:lnTo>
-                  <a:lnTo>
-                    <a:pt x="5586557" y="3003127"/>
-                  </a:lnTo>
-                  <a:lnTo>
-                    <a:pt x="5658179" y="3011704"/>
-                  </a:lnTo>
-                  <a:lnTo>
-                    <a:pt x="5729802" y="3020129"/>
-                  </a:lnTo>
-                  <a:lnTo>
-                    <a:pt x="5801424" y="3028403"/>
-                  </a:lnTo>
-                  <a:lnTo>
-                    <a:pt x="5873047" y="3036529"/>
-                  </a:lnTo>
-                  <a:lnTo>
-                    <a:pt x="5944669" y="3044510"/>
-                  </a:lnTo>
-                  <a:lnTo>
-                    <a:pt x="6016292" y="3052349"/>
-                  </a:lnTo>
-                  <a:lnTo>
-                    <a:pt x="6087914" y="3060048"/>
-                  </a:lnTo>
-                  <a:lnTo>
-                    <a:pt x="6159537" y="3067609"/>
-                  </a:lnTo>
-                  <a:lnTo>
-                    <a:pt x="6231159" y="3075036"/>
-                  </a:lnTo>
-                  <a:lnTo>
-                    <a:pt x="6302782" y="3082330"/>
-                  </a:lnTo>
-                  <a:lnTo>
-                    <a:pt x="6374404" y="3089494"/>
-                  </a:lnTo>
-                  <a:lnTo>
-                    <a:pt x="6446027" y="3096530"/>
-                  </a:lnTo>
-                  <a:lnTo>
-                    <a:pt x="6517649" y="3103440"/>
-                  </a:lnTo>
-                  <a:lnTo>
-                    <a:pt x="6589272" y="3110227"/>
-                  </a:lnTo>
-                  <a:lnTo>
-                    <a:pt x="6660894" y="3116893"/>
-                  </a:lnTo>
-                  <a:lnTo>
-                    <a:pt x="6732517" y="3123440"/>
-                  </a:lnTo>
-                  <a:lnTo>
-                    <a:pt x="6804139" y="3129870"/>
-                  </a:lnTo>
-                  <a:lnTo>
-                    <a:pt x="6875762" y="3136186"/>
-                  </a:lnTo>
-                  <a:lnTo>
-                    <a:pt x="6947385" y="3142389"/>
-                  </a:lnTo>
-                  <a:lnTo>
-                    <a:pt x="7019007" y="3148481"/>
-                  </a:lnTo>
-                  <a:lnTo>
-                    <a:pt x="7090630" y="3154464"/>
-                  </a:lnTo>
-                  <a:lnTo>
-                    <a:pt x="7090630" y="3360695"/>
-                  </a:lnTo>
-                  <a:lnTo>
-                    <a:pt x="7019007" y="3356032"/>
-                  </a:lnTo>
-                  <a:lnTo>
-                    <a:pt x="6947385" y="3351192"/>
-                  </a:lnTo>
-                  <a:lnTo>
-                    <a:pt x="6875762" y="3346170"/>
-                  </a:lnTo>
-                  <a:lnTo>
-                    <a:pt x="6804139" y="3340956"/>
-                  </a:lnTo>
-                  <a:lnTo>
-                    <a:pt x="6732517" y="3335545"/>
-                  </a:lnTo>
-                  <a:lnTo>
-                    <a:pt x="6660894" y="3329929"/>
-                  </a:lnTo>
-                  <a:lnTo>
-                    <a:pt x="6589272" y="3324101"/>
-                  </a:lnTo>
-                  <a:lnTo>
-                    <a:pt x="6517649" y="3318051"/>
-                  </a:lnTo>
-                  <a:lnTo>
-                    <a:pt x="6446027" y="3311772"/>
-                  </a:lnTo>
-                  <a:lnTo>
-                    <a:pt x="6374404" y="3305256"/>
-                  </a:lnTo>
-                  <a:lnTo>
-                    <a:pt x="6302782" y="3298492"/>
-                  </a:lnTo>
-                  <a:lnTo>
-                    <a:pt x="6231159" y="3291472"/>
-                  </a:lnTo>
-                  <a:lnTo>
-                    <a:pt x="6159537" y="3284186"/>
-                  </a:lnTo>
-                  <a:lnTo>
-                    <a:pt x="6087914" y="3276624"/>
-                  </a:lnTo>
-                  <a:lnTo>
-                    <a:pt x="6016292" y="3268775"/>
-                  </a:lnTo>
-                  <a:lnTo>
-                    <a:pt x="5944669" y="3260629"/>
-                  </a:lnTo>
-                  <a:lnTo>
-                    <a:pt x="5873047" y="3252174"/>
-                  </a:lnTo>
-                  <a:lnTo>
-                    <a:pt x="5801424" y="3243399"/>
-                  </a:lnTo>
-                  <a:lnTo>
-                    <a:pt x="5729802" y="3234291"/>
-                  </a:lnTo>
-                  <a:lnTo>
-                    <a:pt x="5658179" y="3224839"/>
-                  </a:lnTo>
-                  <a:lnTo>
-                    <a:pt x="5586557" y="3215028"/>
-                  </a:lnTo>
-                  <a:lnTo>
-                    <a:pt x="5514934" y="3204845"/>
-                  </a:lnTo>
-                  <a:lnTo>
-                    <a:pt x="5443311" y="3194276"/>
-                  </a:lnTo>
-                  <a:lnTo>
-                    <a:pt x="5371689" y="3183307"/>
-                  </a:lnTo>
-                  <a:lnTo>
-                    <a:pt x="5300066" y="3171922"/>
-                  </a:lnTo>
-                  <a:lnTo>
-                    <a:pt x="5228444" y="3160106"/>
-                  </a:lnTo>
-                  <a:lnTo>
-                    <a:pt x="5156821" y="3147842"/>
-                  </a:lnTo>
-                  <a:lnTo>
-                    <a:pt x="5085199" y="3135113"/>
-                  </a:lnTo>
-                  <a:lnTo>
-                    <a:pt x="5013576" y="3121902"/>
-                  </a:lnTo>
-                  <a:lnTo>
-                    <a:pt x="4941954" y="3108191"/>
-                  </a:lnTo>
-                  <a:lnTo>
-                    <a:pt x="4870331" y="3093960"/>
-                  </a:lnTo>
-                  <a:lnTo>
-                    <a:pt x="4798709" y="3079189"/>
-                  </a:lnTo>
-                  <a:lnTo>
-                    <a:pt x="4727086" y="3063859"/>
-                  </a:lnTo>
-                  <a:lnTo>
-                    <a:pt x="4655464" y="3047948"/>
-                  </a:lnTo>
-                  <a:lnTo>
-                    <a:pt x="4583841" y="3031434"/>
-                  </a:lnTo>
-                  <a:lnTo>
-                    <a:pt x="4512219" y="3014294"/>
-                  </a:lnTo>
-                  <a:lnTo>
-                    <a:pt x="4440596" y="2996504"/>
-                  </a:lnTo>
-                  <a:lnTo>
-                    <a:pt x="4368974" y="2978041"/>
-                  </a:lnTo>
-                  <a:lnTo>
-                    <a:pt x="4297351" y="2958878"/>
-                  </a:lnTo>
-                  <a:lnTo>
-                    <a:pt x="4225729" y="2938989"/>
-                  </a:lnTo>
-                  <a:lnTo>
-                    <a:pt x="4154106" y="2918346"/>
-                  </a:lnTo>
-                  <a:lnTo>
-                    <a:pt x="4082483" y="2896921"/>
-                  </a:lnTo>
-                  <a:lnTo>
-                    <a:pt x="4010861" y="2874683"/>
-                  </a:lnTo>
-                  <a:lnTo>
-                    <a:pt x="3939238" y="2851604"/>
-                  </a:lnTo>
-                  <a:lnTo>
-                    <a:pt x="3867616" y="2827649"/>
-                  </a:lnTo>
-                  <a:lnTo>
-                    <a:pt x="3795993" y="2802787"/>
-                  </a:lnTo>
-                  <a:lnTo>
-                    <a:pt x="3724371" y="2776983"/>
-                  </a:lnTo>
-                  <a:lnTo>
-                    <a:pt x="3652748" y="2750201"/>
-                  </a:lnTo>
-                  <a:lnTo>
-                    <a:pt x="3581126" y="2722405"/>
-                  </a:lnTo>
-                  <a:lnTo>
-                    <a:pt x="3509503" y="2693554"/>
-                  </a:lnTo>
-                  <a:lnTo>
-                    <a:pt x="3437881" y="2663611"/>
-                  </a:lnTo>
-                  <a:lnTo>
-                    <a:pt x="3366258" y="2643823"/>
-                  </a:lnTo>
-                  <a:lnTo>
-                    <a:pt x="3294636" y="2628561"/>
-                  </a:lnTo>
-                  <a:lnTo>
-                    <a:pt x="3223013" y="2613021"/>
-                  </a:lnTo>
-                  <a:lnTo>
-                    <a:pt x="3151391" y="2597200"/>
-                  </a:lnTo>
-                  <a:lnTo>
-                    <a:pt x="3079768" y="2581091"/>
-                  </a:lnTo>
-                  <a:lnTo>
-                    <a:pt x="3008146" y="2564689"/>
-                  </a:lnTo>
-                  <a:lnTo>
-                    <a:pt x="2936523" y="2547989"/>
-                  </a:lnTo>
-                  <a:lnTo>
-                    <a:pt x="2864901" y="2530985"/>
-                  </a:lnTo>
-                  <a:lnTo>
-                    <a:pt x="2793278" y="2513673"/>
-                  </a:lnTo>
-                  <a:lnTo>
-                    <a:pt x="2721655" y="2496046"/>
-                  </a:lnTo>
-                  <a:lnTo>
-                    <a:pt x="2650033" y="2478099"/>
-                  </a:lnTo>
-                  <a:lnTo>
-                    <a:pt x="2578410" y="2459826"/>
-                  </a:lnTo>
-                  <a:lnTo>
-                    <a:pt x="2506788" y="2441220"/>
-                  </a:lnTo>
-                  <a:lnTo>
-                    <a:pt x="2435165" y="2422277"/>
-                  </a:lnTo>
-                  <a:lnTo>
-                    <a:pt x="2363543" y="2402989"/>
-                  </a:lnTo>
-                  <a:lnTo>
-                    <a:pt x="2291920" y="2383351"/>
-                  </a:lnTo>
-                  <a:lnTo>
-                    <a:pt x="2220298" y="2363356"/>
-                  </a:lnTo>
-                  <a:lnTo>
-                    <a:pt x="2148675" y="2342998"/>
-                  </a:lnTo>
-                  <a:lnTo>
-                    <a:pt x="2077053" y="2322270"/>
-                  </a:lnTo>
-                  <a:lnTo>
-                    <a:pt x="2005430" y="2301165"/>
-                  </a:lnTo>
-                  <a:lnTo>
-                    <a:pt x="1933808" y="2279676"/>
-                  </a:lnTo>
-                  <a:lnTo>
-                    <a:pt x="1862185" y="2257798"/>
-                  </a:lnTo>
-                  <a:lnTo>
-                    <a:pt x="1790563" y="2235521"/>
-                  </a:lnTo>
-                  <a:lnTo>
-                    <a:pt x="1718940" y="2212840"/>
-                  </a:lnTo>
-                  <a:lnTo>
-                    <a:pt x="1647318" y="2189747"/>
-                  </a:lnTo>
-                  <a:lnTo>
-                    <a:pt x="1575695" y="2166234"/>
-                  </a:lnTo>
-                  <a:lnTo>
-                    <a:pt x="1504073" y="2142294"/>
-                  </a:lnTo>
-                  <a:lnTo>
-                    <a:pt x="1432450" y="2117919"/>
-                  </a:lnTo>
-                  <a:lnTo>
-                    <a:pt x="1360827" y="2093101"/>
-                  </a:lnTo>
-                  <a:lnTo>
-                    <a:pt x="1289205" y="2067832"/>
-                  </a:lnTo>
-                  <a:lnTo>
-                    <a:pt x="1217582" y="2042103"/>
-                  </a:lnTo>
-                  <a:lnTo>
-                    <a:pt x="1145960" y="2015908"/>
-                  </a:lnTo>
-                  <a:lnTo>
-                    <a:pt x="1074337" y="1989236"/>
-                  </a:lnTo>
-                  <a:lnTo>
-                    <a:pt x="1002715" y="1962080"/>
-                  </a:lnTo>
-                  <a:lnTo>
-                    <a:pt x="931092" y="1934430"/>
-                  </a:lnTo>
-                  <a:lnTo>
-                    <a:pt x="859470" y="1906278"/>
-                  </a:lnTo>
-                  <a:lnTo>
-                    <a:pt x="787847" y="1877614"/>
-                  </a:lnTo>
-                  <a:lnTo>
-                    <a:pt x="716225" y="1848429"/>
-                  </a:lnTo>
-                  <a:lnTo>
-                    <a:pt x="644602" y="1818715"/>
-                  </a:lnTo>
-                  <a:lnTo>
-                    <a:pt x="572980" y="1788460"/>
-                  </a:lnTo>
-                  <a:lnTo>
-                    <a:pt x="501357" y="1757655"/>
-                  </a:lnTo>
-                  <a:lnTo>
-                    <a:pt x="429735" y="1726291"/>
-                  </a:lnTo>
-                  <a:lnTo>
-                    <a:pt x="358112" y="1694357"/>
-                  </a:lnTo>
-                  <a:lnTo>
-                    <a:pt x="286490" y="1661842"/>
-                  </a:lnTo>
-                  <a:lnTo>
-                    <a:pt x="214867" y="1628737"/>
-                  </a:lnTo>
-                  <a:lnTo>
-                    <a:pt x="143245" y="1595030"/>
-                  </a:lnTo>
-                  <a:lnTo>
-                    <a:pt x="71622" y="1560711"/>
-                  </a:lnTo>
-                  <a:lnTo>
-                    <a:pt x="0" y="1525768"/>
+                    <a:pt x="716225" y="76736"/>
+                  </a:lnTo>
+                  <a:lnTo>
+                    <a:pt x="787847" y="202065"/>
+                  </a:lnTo>
+                  <a:lnTo>
+                    <a:pt x="859470" y="322783"/>
+                  </a:lnTo>
+                  <a:lnTo>
+                    <a:pt x="931092" y="439061"/>
+                  </a:lnTo>
+                  <a:lnTo>
+                    <a:pt x="1002715" y="551061"/>
+                  </a:lnTo>
+                  <a:lnTo>
+                    <a:pt x="1074337" y="658942"/>
+                  </a:lnTo>
+                  <a:lnTo>
+                    <a:pt x="1145960" y="762853"/>
+                  </a:lnTo>
+                  <a:lnTo>
+                    <a:pt x="1217582" y="862943"/>
+                  </a:lnTo>
+                  <a:lnTo>
+                    <a:pt x="1289205" y="959350"/>
+                  </a:lnTo>
+                  <a:lnTo>
+                    <a:pt x="1360827" y="1052212"/>
+                  </a:lnTo>
+                  <a:lnTo>
+                    <a:pt x="1432450" y="1141657"/>
+                  </a:lnTo>
+                  <a:lnTo>
+                    <a:pt x="1504073" y="1227812"/>
+                  </a:lnTo>
+                  <a:lnTo>
+                    <a:pt x="1575695" y="1310797"/>
+                  </a:lnTo>
+                  <a:lnTo>
+                    <a:pt x="1647318" y="1390730"/>
+                  </a:lnTo>
+                  <a:lnTo>
+                    <a:pt x="1718940" y="1467723"/>
+                  </a:lnTo>
+                  <a:lnTo>
+                    <a:pt x="1790563" y="1541884"/>
+                  </a:lnTo>
+                  <a:lnTo>
+                    <a:pt x="1862185" y="1613316"/>
+                  </a:lnTo>
+                  <a:lnTo>
+                    <a:pt x="1933808" y="1682121"/>
+                  </a:lnTo>
+                  <a:lnTo>
+                    <a:pt x="2005430" y="1748394"/>
+                  </a:lnTo>
+                  <a:lnTo>
+                    <a:pt x="2077053" y="1812230"/>
+                  </a:lnTo>
+                  <a:lnTo>
+                    <a:pt x="2148675" y="1873718"/>
+                  </a:lnTo>
+                  <a:lnTo>
+                    <a:pt x="2220298" y="1932943"/>
+                  </a:lnTo>
+                  <a:lnTo>
+                    <a:pt x="2291920" y="1989991"/>
+                  </a:lnTo>
+                  <a:lnTo>
+                    <a:pt x="2363543" y="2044939"/>
+                  </a:lnTo>
+                  <a:lnTo>
+                    <a:pt x="2435165" y="2097866"/>
+                  </a:lnTo>
+                  <a:lnTo>
+                    <a:pt x="2506788" y="2148847"/>
+                  </a:lnTo>
+                  <a:lnTo>
+                    <a:pt x="2578410" y="2197952"/>
+                  </a:lnTo>
+                  <a:lnTo>
+                    <a:pt x="2650033" y="2245250"/>
+                  </a:lnTo>
+                  <a:lnTo>
+                    <a:pt x="2721655" y="2290809"/>
+                  </a:lnTo>
+                  <a:lnTo>
+                    <a:pt x="2793278" y="2334692"/>
+                  </a:lnTo>
+                  <a:lnTo>
+                    <a:pt x="2864901" y="2376960"/>
+                  </a:lnTo>
+                  <a:lnTo>
+                    <a:pt x="2936523" y="2417674"/>
+                  </a:lnTo>
+                  <a:lnTo>
+                    <a:pt x="3008146" y="2456890"/>
+                  </a:lnTo>
+                  <a:lnTo>
+                    <a:pt x="3079768" y="2494663"/>
+                  </a:lnTo>
+                  <a:lnTo>
+                    <a:pt x="3151391" y="2531047"/>
+                  </a:lnTo>
+                  <a:lnTo>
+                    <a:pt x="3223013" y="2566093"/>
+                  </a:lnTo>
+                  <a:lnTo>
+                    <a:pt x="3294636" y="2599849"/>
+                  </a:lnTo>
+                  <a:lnTo>
+                    <a:pt x="3366258" y="2632364"/>
+                  </a:lnTo>
+                  <a:lnTo>
+                    <a:pt x="3437881" y="2658890"/>
+                  </a:lnTo>
+                  <a:lnTo>
+                    <a:pt x="3509503" y="2673863"/>
+                  </a:lnTo>
+                  <a:lnTo>
+                    <a:pt x="3581126" y="2688564"/>
+                  </a:lnTo>
+                  <a:lnTo>
+                    <a:pt x="3652748" y="2702999"/>
+                  </a:lnTo>
+                  <a:lnTo>
+                    <a:pt x="3724371" y="2717171"/>
+                  </a:lnTo>
+                  <a:lnTo>
+                    <a:pt x="3795993" y="2731086"/>
+                  </a:lnTo>
+                  <a:lnTo>
+                    <a:pt x="3867616" y="2744748"/>
+                  </a:lnTo>
+                  <a:lnTo>
+                    <a:pt x="3939238" y="2758162"/>
+                  </a:lnTo>
+                  <a:lnTo>
+                    <a:pt x="4010861" y="2771333"/>
+                  </a:lnTo>
+                  <a:lnTo>
+                    <a:pt x="4082483" y="2784265"/>
+                  </a:lnTo>
+                  <a:lnTo>
+                    <a:pt x="4154106" y="2796962"/>
+                  </a:lnTo>
+                  <a:lnTo>
+                    <a:pt x="4225729" y="2809429"/>
+                  </a:lnTo>
+                  <a:lnTo>
+                    <a:pt x="4297351" y="2821669"/>
+                  </a:lnTo>
+                  <a:lnTo>
+                    <a:pt x="4368974" y="2833687"/>
+                  </a:lnTo>
+                  <a:lnTo>
+                    <a:pt x="4440596" y="2845487"/>
+                  </a:lnTo>
+                  <a:lnTo>
+                    <a:pt x="4512219" y="2857073"/>
+                  </a:lnTo>
+                  <a:lnTo>
+                    <a:pt x="4583841" y="2868448"/>
+                  </a:lnTo>
+                  <a:lnTo>
+                    <a:pt x="4655464" y="2879617"/>
+                  </a:lnTo>
+                  <a:lnTo>
+                    <a:pt x="4727086" y="2890583"/>
+                  </a:lnTo>
+                  <a:lnTo>
+                    <a:pt x="4798709" y="2901351"/>
+                  </a:lnTo>
+                  <a:lnTo>
+                    <a:pt x="4870331" y="2911922"/>
+                  </a:lnTo>
+                  <a:lnTo>
+                    <a:pt x="4941954" y="2922302"/>
+                  </a:lnTo>
+                  <a:lnTo>
+                    <a:pt x="5013576" y="2932493"/>
+                  </a:lnTo>
+                  <a:lnTo>
+                    <a:pt x="5085199" y="2942500"/>
+                  </a:lnTo>
+                  <a:lnTo>
+                    <a:pt x="5156821" y="2952325"/>
+                  </a:lnTo>
+                  <a:lnTo>
+                    <a:pt x="5228444" y="2961971"/>
+                  </a:lnTo>
+                  <a:lnTo>
+                    <a:pt x="5300066" y="2971442"/>
+                  </a:lnTo>
+                  <a:lnTo>
+                    <a:pt x="5371689" y="2980742"/>
+                  </a:lnTo>
+                  <a:lnTo>
+                    <a:pt x="5443311" y="2989872"/>
+                  </a:lnTo>
+                  <a:lnTo>
+                    <a:pt x="5514934" y="2998837"/>
+                  </a:lnTo>
+                  <a:lnTo>
+                    <a:pt x="5586557" y="3007639"/>
+                  </a:lnTo>
+                  <a:lnTo>
+                    <a:pt x="5658179" y="3016282"/>
+                  </a:lnTo>
+                  <a:lnTo>
+                    <a:pt x="5729802" y="3024767"/>
+                  </a:lnTo>
+                  <a:lnTo>
+                    <a:pt x="5801424" y="3033098"/>
+                  </a:lnTo>
+                  <a:lnTo>
+                    <a:pt x="5873047" y="3041279"/>
+                  </a:lnTo>
+                  <a:lnTo>
+                    <a:pt x="5944669" y="3049310"/>
+                  </a:lnTo>
+                  <a:lnTo>
+                    <a:pt x="6016292" y="3057196"/>
+                  </a:lnTo>
+                  <a:lnTo>
+                    <a:pt x="6087914" y="3064939"/>
+                  </a:lnTo>
+                  <a:lnTo>
+                    <a:pt x="6159537" y="3072541"/>
+                  </a:lnTo>
+                  <a:lnTo>
+                    <a:pt x="6231159" y="3080006"/>
+                  </a:lnTo>
+                  <a:lnTo>
+                    <a:pt x="6302782" y="3087334"/>
+                  </a:lnTo>
+                  <a:lnTo>
+                    <a:pt x="6374404" y="3094530"/>
+                  </a:lnTo>
+                  <a:lnTo>
+                    <a:pt x="6446027" y="3101595"/>
+                  </a:lnTo>
+                  <a:lnTo>
+                    <a:pt x="6517649" y="3108532"/>
+                  </a:lnTo>
+                  <a:lnTo>
+                    <a:pt x="6589272" y="3115343"/>
+                  </a:lnTo>
+                  <a:lnTo>
+                    <a:pt x="6660894" y="3122030"/>
+                  </a:lnTo>
+                  <a:lnTo>
+                    <a:pt x="6732517" y="3128596"/>
+                  </a:lnTo>
+                  <a:lnTo>
+                    <a:pt x="6804139" y="3135043"/>
+                  </a:lnTo>
+                  <a:lnTo>
+                    <a:pt x="6875762" y="3141372"/>
+                  </a:lnTo>
+                  <a:lnTo>
+                    <a:pt x="6947385" y="3147587"/>
+                  </a:lnTo>
+                  <a:lnTo>
+                    <a:pt x="7019007" y="3153689"/>
+                  </a:lnTo>
+                  <a:lnTo>
+                    <a:pt x="7090630" y="3159680"/>
+                  </a:lnTo>
+                  <a:lnTo>
+                    <a:pt x="7090630" y="3362485"/>
+                  </a:lnTo>
+                  <a:lnTo>
+                    <a:pt x="7019007" y="3357854"/>
+                  </a:lnTo>
+                  <a:lnTo>
+                    <a:pt x="6947385" y="3353046"/>
+                  </a:lnTo>
+                  <a:lnTo>
+                    <a:pt x="6875762" y="3348055"/>
+                  </a:lnTo>
+                  <a:lnTo>
+                    <a:pt x="6804139" y="3342873"/>
+                  </a:lnTo>
+                  <a:lnTo>
+                    <a:pt x="6732517" y="3337493"/>
+                  </a:lnTo>
+                  <a:lnTo>
+                    <a:pt x="6660894" y="3331907"/>
+                  </a:lnTo>
+                  <a:lnTo>
+                    <a:pt x="6589272" y="3326109"/>
+                  </a:lnTo>
+                  <a:lnTo>
+                    <a:pt x="6517649" y="3320088"/>
+                  </a:lnTo>
+                  <a:lnTo>
+                    <a:pt x="6446027" y="3313838"/>
+                  </a:lnTo>
+                  <a:lnTo>
+                    <a:pt x="6374404" y="3307349"/>
+                  </a:lnTo>
+                  <a:lnTo>
+                    <a:pt x="6302782" y="3300613"/>
+                  </a:lnTo>
+                  <a:lnTo>
+                    <a:pt x="6231159" y="3293619"/>
+                  </a:lnTo>
+                  <a:lnTo>
+                    <a:pt x="6159537" y="3286358"/>
+                  </a:lnTo>
+                  <a:lnTo>
+                    <a:pt x="6087914" y="3278819"/>
+                  </a:lnTo>
+                  <a:lnTo>
+                    <a:pt x="6016292" y="3270993"/>
+                  </a:lnTo>
+                  <a:lnTo>
+                    <a:pt x="5944669" y="3262868"/>
+                  </a:lnTo>
+                  <a:lnTo>
+                    <a:pt x="5873047" y="3254433"/>
+                  </a:lnTo>
+                  <a:lnTo>
+                    <a:pt x="5801424" y="3245675"/>
+                  </a:lnTo>
+                  <a:lnTo>
+                    <a:pt x="5729802" y="3236583"/>
+                  </a:lnTo>
+                  <a:lnTo>
+                    <a:pt x="5658179" y="3227144"/>
+                  </a:lnTo>
+                  <a:lnTo>
+                    <a:pt x="5586557" y="3217344"/>
+                  </a:lnTo>
+                  <a:lnTo>
+                    <a:pt x="5514934" y="3207170"/>
+                  </a:lnTo>
+                  <a:lnTo>
+                    <a:pt x="5443311" y="3196607"/>
+                  </a:lnTo>
+                  <a:lnTo>
+                    <a:pt x="5371689" y="3185642"/>
+                  </a:lnTo>
+                  <a:lnTo>
+                    <a:pt x="5300066" y="3174257"/>
+                  </a:lnTo>
+                  <a:lnTo>
+                    <a:pt x="5228444" y="3162437"/>
+                  </a:lnTo>
+                  <a:lnTo>
+                    <a:pt x="5156821" y="3150166"/>
+                  </a:lnTo>
+                  <a:lnTo>
+                    <a:pt x="5085199" y="3137427"/>
+                  </a:lnTo>
+                  <a:lnTo>
+                    <a:pt x="5013576" y="3124201"/>
+                  </a:lnTo>
+                  <a:lnTo>
+                    <a:pt x="4941954" y="3110470"/>
+                  </a:lnTo>
+                  <a:lnTo>
+                    <a:pt x="4870331" y="3096214"/>
+                  </a:lnTo>
+                  <a:lnTo>
+                    <a:pt x="4798709" y="3081414"/>
+                  </a:lnTo>
+                  <a:lnTo>
+                    <a:pt x="4727086" y="3066049"/>
+                  </a:lnTo>
+                  <a:lnTo>
+                    <a:pt x="4655464" y="3050097"/>
+                  </a:lnTo>
+                  <a:lnTo>
+                    <a:pt x="4583841" y="3033536"/>
+                  </a:lnTo>
+                  <a:lnTo>
+                    <a:pt x="4512219" y="3016342"/>
+                  </a:lnTo>
+                  <a:lnTo>
+                    <a:pt x="4440596" y="2998491"/>
+                  </a:lnTo>
+                  <a:lnTo>
+                    <a:pt x="4368974" y="2979959"/>
+                  </a:lnTo>
+                  <a:lnTo>
+                    <a:pt x="4297351" y="2960720"/>
+                  </a:lnTo>
+                  <a:lnTo>
+                    <a:pt x="4225729" y="2940745"/>
+                  </a:lnTo>
+                  <a:lnTo>
+                    <a:pt x="4154106" y="2920008"/>
+                  </a:lnTo>
+                  <a:lnTo>
+                    <a:pt x="4082483" y="2898478"/>
+                  </a:lnTo>
+                  <a:lnTo>
+                    <a:pt x="4010861" y="2876127"/>
+                  </a:lnTo>
+                  <a:lnTo>
+                    <a:pt x="3939238" y="2852921"/>
+                  </a:lnTo>
+                  <a:lnTo>
+                    <a:pt x="3867616" y="2828830"/>
+                  </a:lnTo>
+                  <a:lnTo>
+                    <a:pt x="3795993" y="2803819"/>
+                  </a:lnTo>
+                  <a:lnTo>
+                    <a:pt x="3724371" y="2777852"/>
+                  </a:lnTo>
+                  <a:lnTo>
+                    <a:pt x="3652748" y="2750893"/>
+                  </a:lnTo>
+                  <a:lnTo>
+                    <a:pt x="3581126" y="2722906"/>
+                  </a:lnTo>
+                  <a:lnTo>
+                    <a:pt x="3509503" y="2693849"/>
+                  </a:lnTo>
+                  <a:lnTo>
+                    <a:pt x="3437881" y="2663682"/>
+                  </a:lnTo>
+                  <a:lnTo>
+                    <a:pt x="3366258" y="2643641"/>
+                  </a:lnTo>
+                  <a:lnTo>
+                    <a:pt x="3294636" y="2628109"/>
+                  </a:lnTo>
+                  <a:lnTo>
+                    <a:pt x="3223013" y="2612290"/>
+                  </a:lnTo>
+                  <a:lnTo>
+                    <a:pt x="3151391" y="2596179"/>
+                  </a:lnTo>
+                  <a:lnTo>
+                    <a:pt x="3079768" y="2579770"/>
+                  </a:lnTo>
+                  <a:lnTo>
+                    <a:pt x="3008146" y="2563058"/>
+                  </a:lnTo>
+                  <a:lnTo>
+                    <a:pt x="2936523" y="2546036"/>
+                  </a:lnTo>
+                  <a:lnTo>
+                    <a:pt x="2864901" y="2528700"/>
+                  </a:lnTo>
+                  <a:lnTo>
+                    <a:pt x="2793278" y="2511044"/>
+                  </a:lnTo>
+                  <a:lnTo>
+                    <a:pt x="2721655" y="2493061"/>
+                  </a:lnTo>
+                  <a:lnTo>
+                    <a:pt x="2650033" y="2474745"/>
+                  </a:lnTo>
+                  <a:lnTo>
+                    <a:pt x="2578410" y="2456091"/>
+                  </a:lnTo>
+                  <a:lnTo>
+                    <a:pt x="2506788" y="2437092"/>
+                  </a:lnTo>
+                  <a:lnTo>
+                    <a:pt x="2435165" y="2417742"/>
+                  </a:lnTo>
+                  <a:lnTo>
+                    <a:pt x="2363543" y="2398034"/>
+                  </a:lnTo>
+                  <a:lnTo>
+                    <a:pt x="2291920" y="2377962"/>
+                  </a:lnTo>
+                  <a:lnTo>
+                    <a:pt x="2220298" y="2357518"/>
+                  </a:lnTo>
+                  <a:lnTo>
+                    <a:pt x="2148675" y="2336697"/>
+                  </a:lnTo>
+                  <a:lnTo>
+                    <a:pt x="2077053" y="2315491"/>
+                  </a:lnTo>
+                  <a:lnTo>
+                    <a:pt x="2005430" y="2293892"/>
+                  </a:lnTo>
+                  <a:lnTo>
+                    <a:pt x="1933808" y="2271895"/>
+                  </a:lnTo>
+                  <a:lnTo>
+                    <a:pt x="1862185" y="2249490"/>
+                  </a:lnTo>
+                  <a:lnTo>
+                    <a:pt x="1790563" y="2226672"/>
+                  </a:lnTo>
+                  <a:lnTo>
+                    <a:pt x="1718940" y="2203431"/>
+                  </a:lnTo>
+                  <a:lnTo>
+                    <a:pt x="1647318" y="2179761"/>
+                  </a:lnTo>
+                  <a:lnTo>
+                    <a:pt x="1575695" y="2155654"/>
+                  </a:lnTo>
+                  <a:lnTo>
+                    <a:pt x="1504073" y="2131100"/>
+                  </a:lnTo>
+                  <a:lnTo>
+                    <a:pt x="1432450" y="2106093"/>
+                  </a:lnTo>
+                  <a:lnTo>
+                    <a:pt x="1360827" y="2080623"/>
+                  </a:lnTo>
+                  <a:lnTo>
+                    <a:pt x="1289205" y="2054683"/>
+                  </a:lnTo>
+                  <a:lnTo>
+                    <a:pt x="1217582" y="2028263"/>
+                  </a:lnTo>
+                  <a:lnTo>
+                    <a:pt x="1145960" y="2001354"/>
+                  </a:lnTo>
+                  <a:lnTo>
+                    <a:pt x="1074337" y="1973948"/>
+                  </a:lnTo>
+                  <a:lnTo>
+                    <a:pt x="1002715" y="1946036"/>
+                  </a:lnTo>
+                  <a:lnTo>
+                    <a:pt x="931092" y="1917607"/>
+                  </a:lnTo>
+                  <a:lnTo>
+                    <a:pt x="859470" y="1888653"/>
+                  </a:lnTo>
+                  <a:lnTo>
+                    <a:pt x="787847" y="1859163"/>
+                  </a:lnTo>
+                  <a:lnTo>
+                    <a:pt x="716225" y="1829128"/>
+                  </a:lnTo>
+                  <a:lnTo>
+                    <a:pt x="644602" y="1798538"/>
+                  </a:lnTo>
+                  <a:lnTo>
+                    <a:pt x="572980" y="1767383"/>
+                  </a:lnTo>
+                  <a:lnTo>
+                    <a:pt x="501357" y="1735651"/>
+                  </a:lnTo>
+                  <a:lnTo>
+                    <a:pt x="429735" y="1703333"/>
+                  </a:lnTo>
+                  <a:lnTo>
+                    <a:pt x="358112" y="1670417"/>
+                  </a:lnTo>
+                  <a:lnTo>
+                    <a:pt x="286490" y="1636893"/>
+                  </a:lnTo>
+                  <a:lnTo>
+                    <a:pt x="214867" y="1602749"/>
+                  </a:lnTo>
+                  <a:lnTo>
+                    <a:pt x="143245" y="1567974"/>
+                  </a:lnTo>
+                  <a:lnTo>
+                    <a:pt x="71622" y="1532556"/>
+                  </a:lnTo>
+                  <a:lnTo>
+                    <a:pt x="0" y="1496483"/>
                   </a:lnTo>
                   <a:close/>
                 </a:path>
@@ -4036,285 +4036,285 @@
           </p:nvSpPr>
           <p:spPr>
             <a:xfrm>
-              <a:off x="1824778" y="2073503"/>
-              <a:ext cx="6437901" cy="3154464"/>
+              <a:off x="1846034" y="2073503"/>
+              <a:ext cx="6416645" cy="3159680"/>
             </a:xfrm>
             <a:custGeom>
               <a:avLst/>
               <a:pathLst>
-                <a:path w="6437901" h="3154464">
+                <a:path w="6416645" h="3159680">
                   <a:moveTo>
                     <a:pt x="0" y="0"/>
                   </a:moveTo>
                   <a:lnTo>
-                    <a:pt x="63496" y="113230"/>
-                  </a:lnTo>
-                  <a:lnTo>
-                    <a:pt x="135119" y="236289"/>
-                  </a:lnTo>
-                  <a:lnTo>
-                    <a:pt x="206741" y="354855"/>
-                  </a:lnTo>
-                  <a:lnTo>
-                    <a:pt x="278364" y="469091"/>
-                  </a:lnTo>
-                  <a:lnTo>
-                    <a:pt x="349986" y="579157"/>
-                  </a:lnTo>
-                  <a:lnTo>
-                    <a:pt x="421609" y="685205"/>
-                  </a:lnTo>
-                  <a:lnTo>
-                    <a:pt x="493231" y="787380"/>
-                  </a:lnTo>
-                  <a:lnTo>
-                    <a:pt x="564854" y="885825"/>
-                  </a:lnTo>
-                  <a:lnTo>
-                    <a:pt x="636476" y="980676"/>
-                  </a:lnTo>
-                  <a:lnTo>
-                    <a:pt x="708099" y="1072064"/>
-                  </a:lnTo>
-                  <a:lnTo>
-                    <a:pt x="779721" y="1160115"/>
-                  </a:lnTo>
-                  <a:lnTo>
-                    <a:pt x="851344" y="1244952"/>
-                  </a:lnTo>
-                  <a:lnTo>
-                    <a:pt x="922966" y="1326691"/>
-                  </a:lnTo>
-                  <a:lnTo>
-                    <a:pt x="994589" y="1405445"/>
-                  </a:lnTo>
-                  <a:lnTo>
-                    <a:pt x="1066211" y="1481325"/>
-                  </a:lnTo>
-                  <a:lnTo>
-                    <a:pt x="1137834" y="1554434"/>
-                  </a:lnTo>
-                  <a:lnTo>
-                    <a:pt x="1209456" y="1624873"/>
-                  </a:lnTo>
-                  <a:lnTo>
-                    <a:pt x="1281079" y="1692741"/>
-                  </a:lnTo>
-                  <a:lnTo>
-                    <a:pt x="1352702" y="1758132"/>
-                  </a:lnTo>
-                  <a:lnTo>
-                    <a:pt x="1424324" y="1821134"/>
-                  </a:lnTo>
-                  <a:lnTo>
-                    <a:pt x="1495947" y="1881837"/>
-                  </a:lnTo>
-                  <a:lnTo>
-                    <a:pt x="1567569" y="1940323"/>
-                  </a:lnTo>
-                  <a:lnTo>
-                    <a:pt x="1639192" y="1996674"/>
-                  </a:lnTo>
-                  <a:lnTo>
-                    <a:pt x="1710814" y="2050967"/>
-                  </a:lnTo>
-                  <a:lnTo>
-                    <a:pt x="1782437" y="2103278"/>
-                  </a:lnTo>
-                  <a:lnTo>
-                    <a:pt x="1854059" y="2153680"/>
-                  </a:lnTo>
-                  <a:lnTo>
-                    <a:pt x="1925682" y="2202241"/>
-                  </a:lnTo>
-                  <a:lnTo>
-                    <a:pt x="1997304" y="2249029"/>
-                  </a:lnTo>
-                  <a:lnTo>
-                    <a:pt x="2068927" y="2294109"/>
-                  </a:lnTo>
-                  <a:lnTo>
-                    <a:pt x="2140549" y="2337543"/>
-                  </a:lnTo>
-                  <a:lnTo>
-                    <a:pt x="2212172" y="2379391"/>
-                  </a:lnTo>
-                  <a:lnTo>
-                    <a:pt x="2283794" y="2419711"/>
-                  </a:lnTo>
-                  <a:lnTo>
-                    <a:pt x="2355417" y="2458560"/>
-                  </a:lnTo>
-                  <a:lnTo>
-                    <a:pt x="2427039" y="2495989"/>
-                  </a:lnTo>
-                  <a:lnTo>
-                    <a:pt x="2498662" y="2532053"/>
-                  </a:lnTo>
-                  <a:lnTo>
-                    <a:pt x="2570284" y="2566799"/>
-                  </a:lnTo>
-                  <a:lnTo>
-                    <a:pt x="2641907" y="2600277"/>
-                  </a:lnTo>
-                  <a:lnTo>
-                    <a:pt x="2713530" y="2632533"/>
-                  </a:lnTo>
-                  <a:lnTo>
-                    <a:pt x="2785152" y="2658812"/>
-                  </a:lnTo>
-                  <a:lnTo>
-                    <a:pt x="2856775" y="2673535"/>
-                  </a:lnTo>
-                  <a:lnTo>
-                    <a:pt x="2928397" y="2687994"/>
-                  </a:lnTo>
-                  <a:lnTo>
-                    <a:pt x="3000020" y="2702195"/>
-                  </a:lnTo>
-                  <a:lnTo>
-                    <a:pt x="3071642" y="2716143"/>
-                  </a:lnTo>
-                  <a:lnTo>
-                    <a:pt x="3143265" y="2729842"/>
-                  </a:lnTo>
-                  <a:lnTo>
-                    <a:pt x="3214887" y="2743297"/>
-                  </a:lnTo>
-                  <a:lnTo>
-                    <a:pt x="3286510" y="2756511"/>
-                  </a:lnTo>
-                  <a:lnTo>
-                    <a:pt x="3358132" y="2769490"/>
-                  </a:lnTo>
-                  <a:lnTo>
-                    <a:pt x="3429755" y="2782236"/>
-                  </a:lnTo>
-                  <a:lnTo>
-                    <a:pt x="3501377" y="2794756"/>
-                  </a:lnTo>
-                  <a:lnTo>
-                    <a:pt x="3573000" y="2807052"/>
-                  </a:lnTo>
-                  <a:lnTo>
-                    <a:pt x="3644622" y="2819128"/>
-                  </a:lnTo>
-                  <a:lnTo>
-                    <a:pt x="3716245" y="2830990"/>
-                  </a:lnTo>
-                  <a:lnTo>
-                    <a:pt x="3787867" y="2842639"/>
-                  </a:lnTo>
-                  <a:lnTo>
-                    <a:pt x="3859490" y="2854080"/>
-                  </a:lnTo>
-                  <a:lnTo>
-                    <a:pt x="3931112" y="2865318"/>
-                  </a:lnTo>
-                  <a:lnTo>
-                    <a:pt x="4002735" y="2876354"/>
-                  </a:lnTo>
-                  <a:lnTo>
-                    <a:pt x="4074358" y="2887194"/>
-                  </a:lnTo>
-                  <a:lnTo>
-                    <a:pt x="4145980" y="2897841"/>
-                  </a:lnTo>
-                  <a:lnTo>
-                    <a:pt x="4217603" y="2908297"/>
-                  </a:lnTo>
-                  <a:lnTo>
-                    <a:pt x="4289225" y="2918567"/>
-                  </a:lnTo>
-                  <a:lnTo>
-                    <a:pt x="4360848" y="2928653"/>
-                  </a:lnTo>
-                  <a:lnTo>
-                    <a:pt x="4432470" y="2938559"/>
-                  </a:lnTo>
-                  <a:lnTo>
-                    <a:pt x="4504093" y="2948289"/>
-                  </a:lnTo>
-                  <a:lnTo>
-                    <a:pt x="4575715" y="2957845"/>
-                  </a:lnTo>
-                  <a:lnTo>
-                    <a:pt x="4647338" y="2967231"/>
-                  </a:lnTo>
-                  <a:lnTo>
-                    <a:pt x="4718960" y="2976448"/>
-                  </a:lnTo>
-                  <a:lnTo>
-                    <a:pt x="4790583" y="2985502"/>
-                  </a:lnTo>
-                  <a:lnTo>
-                    <a:pt x="4862205" y="2994394"/>
-                  </a:lnTo>
-                  <a:lnTo>
-                    <a:pt x="4933828" y="3003127"/>
-                  </a:lnTo>
-                  <a:lnTo>
-                    <a:pt x="5005450" y="3011704"/>
-                  </a:lnTo>
-                  <a:lnTo>
-                    <a:pt x="5077073" y="3020129"/>
-                  </a:lnTo>
-                  <a:lnTo>
-                    <a:pt x="5148695" y="3028403"/>
-                  </a:lnTo>
-                  <a:lnTo>
-                    <a:pt x="5220318" y="3036529"/>
-                  </a:lnTo>
-                  <a:lnTo>
-                    <a:pt x="5291940" y="3044510"/>
-                  </a:lnTo>
-                  <a:lnTo>
-                    <a:pt x="5363563" y="3052349"/>
-                  </a:lnTo>
-                  <a:lnTo>
-                    <a:pt x="5435186" y="3060048"/>
-                  </a:lnTo>
-                  <a:lnTo>
-                    <a:pt x="5506808" y="3067609"/>
-                  </a:lnTo>
-                  <a:lnTo>
-                    <a:pt x="5578431" y="3075036"/>
-                  </a:lnTo>
-                  <a:lnTo>
-                    <a:pt x="5650053" y="3082330"/>
-                  </a:lnTo>
-                  <a:lnTo>
-                    <a:pt x="5721676" y="3089494"/>
-                  </a:lnTo>
-                  <a:lnTo>
-                    <a:pt x="5793298" y="3096530"/>
-                  </a:lnTo>
-                  <a:lnTo>
-                    <a:pt x="5864921" y="3103440"/>
-                  </a:lnTo>
-                  <a:lnTo>
-                    <a:pt x="5936543" y="3110227"/>
-                  </a:lnTo>
-                  <a:lnTo>
-                    <a:pt x="6008166" y="3116893"/>
-                  </a:lnTo>
-                  <a:lnTo>
-                    <a:pt x="6079788" y="3123440"/>
-                  </a:lnTo>
-                  <a:lnTo>
-                    <a:pt x="6151411" y="3129870"/>
-                  </a:lnTo>
-                  <a:lnTo>
-                    <a:pt x="6223033" y="3136186"/>
-                  </a:lnTo>
-                  <a:lnTo>
-                    <a:pt x="6294656" y="3142389"/>
-                  </a:lnTo>
-                  <a:lnTo>
-                    <a:pt x="6366278" y="3148481"/>
-                  </a:lnTo>
-                  <a:lnTo>
-                    <a:pt x="6437901" y="3154464"/>
+                    <a:pt x="42240" y="76736"/>
+                  </a:lnTo>
+                  <a:lnTo>
+                    <a:pt x="113862" y="202065"/>
+                  </a:lnTo>
+                  <a:lnTo>
+                    <a:pt x="185485" y="322783"/>
+                  </a:lnTo>
+                  <a:lnTo>
+                    <a:pt x="257107" y="439061"/>
+                  </a:lnTo>
+                  <a:lnTo>
+                    <a:pt x="328730" y="551061"/>
+                  </a:lnTo>
+                  <a:lnTo>
+                    <a:pt x="400352" y="658942"/>
+                  </a:lnTo>
+                  <a:lnTo>
+                    <a:pt x="471975" y="762853"/>
+                  </a:lnTo>
+                  <a:lnTo>
+                    <a:pt x="543598" y="862943"/>
+                  </a:lnTo>
+                  <a:lnTo>
+                    <a:pt x="615220" y="959350"/>
+                  </a:lnTo>
+                  <a:lnTo>
+                    <a:pt x="686843" y="1052212"/>
+                  </a:lnTo>
+                  <a:lnTo>
+                    <a:pt x="758465" y="1141657"/>
+                  </a:lnTo>
+                  <a:lnTo>
+                    <a:pt x="830088" y="1227812"/>
+                  </a:lnTo>
+                  <a:lnTo>
+                    <a:pt x="901710" y="1310797"/>
+                  </a:lnTo>
+                  <a:lnTo>
+                    <a:pt x="973333" y="1390730"/>
+                  </a:lnTo>
+                  <a:lnTo>
+                    <a:pt x="1044955" y="1467723"/>
+                  </a:lnTo>
+                  <a:lnTo>
+                    <a:pt x="1116578" y="1541884"/>
+                  </a:lnTo>
+                  <a:lnTo>
+                    <a:pt x="1188200" y="1613316"/>
+                  </a:lnTo>
+                  <a:lnTo>
+                    <a:pt x="1259823" y="1682121"/>
+                  </a:lnTo>
+                  <a:lnTo>
+                    <a:pt x="1331445" y="1748394"/>
+                  </a:lnTo>
+                  <a:lnTo>
+                    <a:pt x="1403068" y="1812230"/>
+                  </a:lnTo>
+                  <a:lnTo>
+                    <a:pt x="1474690" y="1873718"/>
+                  </a:lnTo>
+                  <a:lnTo>
+                    <a:pt x="1546313" y="1932943"/>
+                  </a:lnTo>
+                  <a:lnTo>
+                    <a:pt x="1617935" y="1989991"/>
+                  </a:lnTo>
+                  <a:lnTo>
+                    <a:pt x="1689558" y="2044939"/>
+                  </a:lnTo>
+                  <a:lnTo>
+                    <a:pt x="1761180" y="2097866"/>
+                  </a:lnTo>
+                  <a:lnTo>
+                    <a:pt x="1832803" y="2148847"/>
+                  </a:lnTo>
+                  <a:lnTo>
+                    <a:pt x="1904426" y="2197952"/>
+                  </a:lnTo>
+                  <a:lnTo>
+                    <a:pt x="1976048" y="2245250"/>
+                  </a:lnTo>
+                  <a:lnTo>
+                    <a:pt x="2047671" y="2290809"/>
+                  </a:lnTo>
+                  <a:lnTo>
+                    <a:pt x="2119293" y="2334692"/>
+                  </a:lnTo>
+                  <a:lnTo>
+                    <a:pt x="2190916" y="2376960"/>
+                  </a:lnTo>
+                  <a:lnTo>
+                    <a:pt x="2262538" y="2417674"/>
+                  </a:lnTo>
+                  <a:lnTo>
+                    <a:pt x="2334161" y="2456890"/>
+                  </a:lnTo>
+                  <a:lnTo>
+                    <a:pt x="2405783" y="2494663"/>
+                  </a:lnTo>
+                  <a:lnTo>
+                    <a:pt x="2477406" y="2531047"/>
+                  </a:lnTo>
+                  <a:lnTo>
+                    <a:pt x="2549028" y="2566093"/>
+                  </a:lnTo>
+                  <a:lnTo>
+                    <a:pt x="2620651" y="2599849"/>
+                  </a:lnTo>
+                  <a:lnTo>
+                    <a:pt x="2692273" y="2632364"/>
+                  </a:lnTo>
+                  <a:lnTo>
+                    <a:pt x="2763896" y="2658890"/>
+                  </a:lnTo>
+                  <a:lnTo>
+                    <a:pt x="2835518" y="2673863"/>
+                  </a:lnTo>
+                  <a:lnTo>
+                    <a:pt x="2907141" y="2688564"/>
+                  </a:lnTo>
+                  <a:lnTo>
+                    <a:pt x="2978763" y="2702999"/>
+                  </a:lnTo>
+                  <a:lnTo>
+                    <a:pt x="3050386" y="2717171"/>
+                  </a:lnTo>
+                  <a:lnTo>
+                    <a:pt x="3122008" y="2731086"/>
+                  </a:lnTo>
+                  <a:lnTo>
+                    <a:pt x="3193631" y="2744748"/>
+                  </a:lnTo>
+                  <a:lnTo>
+                    <a:pt x="3265253" y="2758162"/>
+                  </a:lnTo>
+                  <a:lnTo>
+                    <a:pt x="3336876" y="2771333"/>
+                  </a:lnTo>
+                  <a:lnTo>
+                    <a:pt x="3408499" y="2784265"/>
+                  </a:lnTo>
+                  <a:lnTo>
+                    <a:pt x="3480121" y="2796962"/>
+                  </a:lnTo>
+                  <a:lnTo>
+                    <a:pt x="3551744" y="2809429"/>
+                  </a:lnTo>
+                  <a:lnTo>
+                    <a:pt x="3623366" y="2821669"/>
+                  </a:lnTo>
+                  <a:lnTo>
+                    <a:pt x="3694989" y="2833687"/>
+                  </a:lnTo>
+                  <a:lnTo>
+                    <a:pt x="3766611" y="2845487"/>
+                  </a:lnTo>
+                  <a:lnTo>
+                    <a:pt x="3838234" y="2857073"/>
+                  </a:lnTo>
+                  <a:lnTo>
+                    <a:pt x="3909856" y="2868448"/>
+                  </a:lnTo>
+                  <a:lnTo>
+                    <a:pt x="3981479" y="2879617"/>
+                  </a:lnTo>
+                  <a:lnTo>
+                    <a:pt x="4053101" y="2890583"/>
+                  </a:lnTo>
+                  <a:lnTo>
+                    <a:pt x="4124724" y="2901351"/>
+                  </a:lnTo>
+                  <a:lnTo>
+                    <a:pt x="4196346" y="2911922"/>
+                  </a:lnTo>
+                  <a:lnTo>
+                    <a:pt x="4267969" y="2922302"/>
+                  </a:lnTo>
+                  <a:lnTo>
+                    <a:pt x="4339591" y="2932493"/>
+                  </a:lnTo>
+                  <a:lnTo>
+                    <a:pt x="4411214" y="2942500"/>
+                  </a:lnTo>
+                  <a:lnTo>
+                    <a:pt x="4482836" y="2952325"/>
+                  </a:lnTo>
+                  <a:lnTo>
+                    <a:pt x="4554459" y="2961971"/>
+                  </a:lnTo>
+                  <a:lnTo>
+                    <a:pt x="4626081" y="2971442"/>
+                  </a:lnTo>
+                  <a:lnTo>
+                    <a:pt x="4697704" y="2980742"/>
+                  </a:lnTo>
+                  <a:lnTo>
+                    <a:pt x="4769327" y="2989872"/>
+                  </a:lnTo>
+                  <a:lnTo>
+                    <a:pt x="4840949" y="2998837"/>
+                  </a:lnTo>
+                  <a:lnTo>
+                    <a:pt x="4912572" y="3007639"/>
+                  </a:lnTo>
+                  <a:lnTo>
+                    <a:pt x="4984194" y="3016282"/>
+                  </a:lnTo>
+                  <a:lnTo>
+                    <a:pt x="5055817" y="3024767"/>
+                  </a:lnTo>
+                  <a:lnTo>
+                    <a:pt x="5127439" y="3033098"/>
+                  </a:lnTo>
+                  <a:lnTo>
+                    <a:pt x="5199062" y="3041279"/>
+                  </a:lnTo>
+                  <a:lnTo>
+                    <a:pt x="5270684" y="3049310"/>
+                  </a:lnTo>
+                  <a:lnTo>
+                    <a:pt x="5342307" y="3057196"/>
+                  </a:lnTo>
+                  <a:lnTo>
+                    <a:pt x="5413929" y="3064939"/>
+                  </a:lnTo>
+                  <a:lnTo>
+                    <a:pt x="5485552" y="3072541"/>
+                  </a:lnTo>
+                  <a:lnTo>
+                    <a:pt x="5557174" y="3080006"/>
+                  </a:lnTo>
+                  <a:lnTo>
+                    <a:pt x="5628797" y="3087334"/>
+                  </a:lnTo>
+                  <a:lnTo>
+                    <a:pt x="5700419" y="3094530"/>
+                  </a:lnTo>
+                  <a:lnTo>
+                    <a:pt x="5772042" y="3101595"/>
+                  </a:lnTo>
+                  <a:lnTo>
+                    <a:pt x="5843664" y="3108532"/>
+                  </a:lnTo>
+                  <a:lnTo>
+                    <a:pt x="5915287" y="3115343"/>
+                  </a:lnTo>
+                  <a:lnTo>
+                    <a:pt x="5986909" y="3122030"/>
+                  </a:lnTo>
+                  <a:lnTo>
+                    <a:pt x="6058532" y="3128596"/>
+                  </a:lnTo>
+                  <a:lnTo>
+                    <a:pt x="6130155" y="3135043"/>
+                  </a:lnTo>
+                  <a:lnTo>
+                    <a:pt x="6201777" y="3141372"/>
+                  </a:lnTo>
+                  <a:lnTo>
+                    <a:pt x="6273400" y="3147587"/>
+                  </a:lnTo>
+                  <a:lnTo>
+                    <a:pt x="6345022" y="3153689"/>
+                  </a:lnTo>
+                  <a:lnTo>
+                    <a:pt x="6416645" y="3159680"/>
                   </a:lnTo>
                 </a:path>
               </a:pathLst>
@@ -4334,309 +4334,309 @@
           </p:nvSpPr>
           <p:spPr>
             <a:xfrm>
-              <a:off x="1172049" y="3599271"/>
-              <a:ext cx="7090630" cy="1834926"/>
+              <a:off x="1172049" y="3569986"/>
+              <a:ext cx="7090630" cy="1866002"/>
             </a:xfrm>
             <a:custGeom>
               <a:avLst/>
               <a:pathLst>
-                <a:path w="7090630" h="1834926">
+                <a:path w="7090630" h="1866002">
                   <a:moveTo>
-                    <a:pt x="7090630" y="1834926"/>
+                    <a:pt x="7090630" y="1866002"/>
                   </a:moveTo>
                   <a:lnTo>
-                    <a:pt x="7019007" y="1830264"/>
-                  </a:lnTo>
-                  <a:lnTo>
-                    <a:pt x="6947385" y="1825424"/>
-                  </a:lnTo>
-                  <a:lnTo>
-                    <a:pt x="6875762" y="1820401"/>
-                  </a:lnTo>
-                  <a:lnTo>
-                    <a:pt x="6804139" y="1815188"/>
-                  </a:lnTo>
-                  <a:lnTo>
-                    <a:pt x="6732517" y="1809777"/>
-                  </a:lnTo>
-                  <a:lnTo>
-                    <a:pt x="6660894" y="1804161"/>
-                  </a:lnTo>
-                  <a:lnTo>
-                    <a:pt x="6589272" y="1798332"/>
-                  </a:lnTo>
-                  <a:lnTo>
-                    <a:pt x="6517649" y="1792283"/>
-                  </a:lnTo>
-                  <a:lnTo>
-                    <a:pt x="6446027" y="1786004"/>
-                  </a:lnTo>
-                  <a:lnTo>
-                    <a:pt x="6374404" y="1779487"/>
-                  </a:lnTo>
-                  <a:lnTo>
-                    <a:pt x="6302782" y="1772723"/>
-                  </a:lnTo>
-                  <a:lnTo>
-                    <a:pt x="6231159" y="1765703"/>
-                  </a:lnTo>
-                  <a:lnTo>
-                    <a:pt x="6159537" y="1758417"/>
-                  </a:lnTo>
-                  <a:lnTo>
-                    <a:pt x="6087914" y="1750855"/>
-                  </a:lnTo>
-                  <a:lnTo>
-                    <a:pt x="6016292" y="1743007"/>
-                  </a:lnTo>
-                  <a:lnTo>
-                    <a:pt x="5944669" y="1734861"/>
-                  </a:lnTo>
-                  <a:lnTo>
-                    <a:pt x="5873047" y="1726406"/>
-                  </a:lnTo>
-                  <a:lnTo>
-                    <a:pt x="5801424" y="1717631"/>
-                  </a:lnTo>
-                  <a:lnTo>
-                    <a:pt x="5729802" y="1708523"/>
-                  </a:lnTo>
-                  <a:lnTo>
-                    <a:pt x="5658179" y="1699070"/>
-                  </a:lnTo>
-                  <a:lnTo>
-                    <a:pt x="5586557" y="1689259"/>
-                  </a:lnTo>
-                  <a:lnTo>
-                    <a:pt x="5514934" y="1679076"/>
-                  </a:lnTo>
-                  <a:lnTo>
-                    <a:pt x="5443311" y="1668508"/>
-                  </a:lnTo>
-                  <a:lnTo>
-                    <a:pt x="5371689" y="1657539"/>
-                  </a:lnTo>
-                  <a:lnTo>
-                    <a:pt x="5300066" y="1646154"/>
-                  </a:lnTo>
-                  <a:lnTo>
-                    <a:pt x="5228444" y="1634338"/>
-                  </a:lnTo>
-                  <a:lnTo>
-                    <a:pt x="5156821" y="1622074"/>
-                  </a:lnTo>
-                  <a:lnTo>
-                    <a:pt x="5085199" y="1609345"/>
-                  </a:lnTo>
-                  <a:lnTo>
-                    <a:pt x="5013576" y="1596134"/>
-                  </a:lnTo>
-                  <a:lnTo>
-                    <a:pt x="4941954" y="1582422"/>
-                  </a:lnTo>
-                  <a:lnTo>
-                    <a:pt x="4870331" y="1568191"/>
-                  </a:lnTo>
-                  <a:lnTo>
-                    <a:pt x="4798709" y="1553421"/>
-                  </a:lnTo>
-                  <a:lnTo>
-                    <a:pt x="4727086" y="1538090"/>
-                  </a:lnTo>
-                  <a:lnTo>
-                    <a:pt x="4655464" y="1522179"/>
-                  </a:lnTo>
-                  <a:lnTo>
-                    <a:pt x="4583841" y="1505665"/>
-                  </a:lnTo>
-                  <a:lnTo>
-                    <a:pt x="4512219" y="1488525"/>
-                  </a:lnTo>
-                  <a:lnTo>
-                    <a:pt x="4440596" y="1470736"/>
-                  </a:lnTo>
-                  <a:lnTo>
-                    <a:pt x="4368974" y="1452273"/>
-                  </a:lnTo>
-                  <a:lnTo>
-                    <a:pt x="4297351" y="1433109"/>
-                  </a:lnTo>
-                  <a:lnTo>
-                    <a:pt x="4225729" y="1413220"/>
-                  </a:lnTo>
-                  <a:lnTo>
-                    <a:pt x="4154106" y="1392577"/>
-                  </a:lnTo>
-                  <a:lnTo>
-                    <a:pt x="4082483" y="1371152"/>
-                  </a:lnTo>
-                  <a:lnTo>
-                    <a:pt x="4010861" y="1348915"/>
-                  </a:lnTo>
-                  <a:lnTo>
-                    <a:pt x="3939238" y="1325835"/>
-                  </a:lnTo>
-                  <a:lnTo>
-                    <a:pt x="3867616" y="1301881"/>
-                  </a:lnTo>
-                  <a:lnTo>
-                    <a:pt x="3795993" y="1277019"/>
-                  </a:lnTo>
-                  <a:lnTo>
-                    <a:pt x="3724371" y="1251215"/>
-                  </a:lnTo>
-                  <a:lnTo>
-                    <a:pt x="3652748" y="1224433"/>
-                  </a:lnTo>
-                  <a:lnTo>
-                    <a:pt x="3581126" y="1196636"/>
-                  </a:lnTo>
-                  <a:lnTo>
-                    <a:pt x="3509503" y="1167786"/>
-                  </a:lnTo>
-                  <a:lnTo>
-                    <a:pt x="3437881" y="1137843"/>
-                  </a:lnTo>
-                  <a:lnTo>
-                    <a:pt x="3366258" y="1118054"/>
-                  </a:lnTo>
-                  <a:lnTo>
-                    <a:pt x="3294636" y="1102792"/>
-                  </a:lnTo>
-                  <a:lnTo>
-                    <a:pt x="3223013" y="1087253"/>
-                  </a:lnTo>
-                  <a:lnTo>
-                    <a:pt x="3151391" y="1071431"/>
-                  </a:lnTo>
-                  <a:lnTo>
-                    <a:pt x="3079768" y="1055322"/>
-                  </a:lnTo>
-                  <a:lnTo>
-                    <a:pt x="3008146" y="1038920"/>
-                  </a:lnTo>
-                  <a:lnTo>
-                    <a:pt x="2936523" y="1022220"/>
-                  </a:lnTo>
-                  <a:lnTo>
-                    <a:pt x="2864901" y="1005217"/>
-                  </a:lnTo>
-                  <a:lnTo>
-                    <a:pt x="2793278" y="987905"/>
-                  </a:lnTo>
-                  <a:lnTo>
-                    <a:pt x="2721655" y="970278"/>
-                  </a:lnTo>
-                  <a:lnTo>
-                    <a:pt x="2650033" y="952330"/>
-                  </a:lnTo>
-                  <a:lnTo>
-                    <a:pt x="2578410" y="934057"/>
-                  </a:lnTo>
-                  <a:lnTo>
-                    <a:pt x="2506788" y="915452"/>
-                  </a:lnTo>
-                  <a:lnTo>
-                    <a:pt x="2435165" y="896508"/>
-                  </a:lnTo>
-                  <a:lnTo>
-                    <a:pt x="2363543" y="877221"/>
-                  </a:lnTo>
-                  <a:lnTo>
-                    <a:pt x="2291920" y="857583"/>
-                  </a:lnTo>
-                  <a:lnTo>
-                    <a:pt x="2220298" y="837588"/>
-                  </a:lnTo>
-                  <a:lnTo>
-                    <a:pt x="2148675" y="817229"/>
-                  </a:lnTo>
-                  <a:lnTo>
-                    <a:pt x="2077053" y="796501"/>
-                  </a:lnTo>
-                  <a:lnTo>
-                    <a:pt x="2005430" y="775396"/>
-                  </a:lnTo>
-                  <a:lnTo>
-                    <a:pt x="1933808" y="753908"/>
-                  </a:lnTo>
-                  <a:lnTo>
-                    <a:pt x="1862185" y="732029"/>
-                  </a:lnTo>
-                  <a:lnTo>
-                    <a:pt x="1790563" y="709753"/>
-                  </a:lnTo>
-                  <a:lnTo>
-                    <a:pt x="1718940" y="687072"/>
-                  </a:lnTo>
-                  <a:lnTo>
-                    <a:pt x="1647318" y="663978"/>
-                  </a:lnTo>
-                  <a:lnTo>
-                    <a:pt x="1575695" y="640465"/>
-                  </a:lnTo>
-                  <a:lnTo>
-                    <a:pt x="1504073" y="616525"/>
-                  </a:lnTo>
-                  <a:lnTo>
-                    <a:pt x="1432450" y="592150"/>
-                  </a:lnTo>
-                  <a:lnTo>
-                    <a:pt x="1360827" y="567332"/>
-                  </a:lnTo>
-                  <a:lnTo>
-                    <a:pt x="1289205" y="542063"/>
-                  </a:lnTo>
-                  <a:lnTo>
-                    <a:pt x="1217582" y="516335"/>
-                  </a:lnTo>
-                  <a:lnTo>
-                    <a:pt x="1145960" y="490139"/>
-                  </a:lnTo>
-                  <a:lnTo>
-                    <a:pt x="1074337" y="463468"/>
-                  </a:lnTo>
-                  <a:lnTo>
-                    <a:pt x="1002715" y="436311"/>
-                  </a:lnTo>
-                  <a:lnTo>
-                    <a:pt x="931092" y="408661"/>
-                  </a:lnTo>
-                  <a:lnTo>
-                    <a:pt x="859470" y="380509"/>
-                  </a:lnTo>
-                  <a:lnTo>
-                    <a:pt x="787847" y="351846"/>
-                  </a:lnTo>
-                  <a:lnTo>
-                    <a:pt x="716225" y="322661"/>
-                  </a:lnTo>
-                  <a:lnTo>
-                    <a:pt x="644602" y="292946"/>
-                  </a:lnTo>
-                  <a:lnTo>
-                    <a:pt x="572980" y="262691"/>
-                  </a:lnTo>
-                  <a:lnTo>
-                    <a:pt x="501357" y="231887"/>
-                  </a:lnTo>
-                  <a:lnTo>
-                    <a:pt x="429735" y="200523"/>
-                  </a:lnTo>
-                  <a:lnTo>
-                    <a:pt x="358112" y="168588"/>
-                  </a:lnTo>
-                  <a:lnTo>
-                    <a:pt x="286490" y="136074"/>
-                  </a:lnTo>
-                  <a:lnTo>
-                    <a:pt x="214867" y="102969"/>
-                  </a:lnTo>
-                  <a:lnTo>
-                    <a:pt x="143245" y="69262"/>
-                  </a:lnTo>
-                  <a:lnTo>
-                    <a:pt x="71622" y="34942"/>
+                    <a:pt x="7019007" y="1861371"/>
+                  </a:lnTo>
+                  <a:lnTo>
+                    <a:pt x="6947385" y="1856563"/>
+                  </a:lnTo>
+                  <a:lnTo>
+                    <a:pt x="6875762" y="1851572"/>
+                  </a:lnTo>
+                  <a:lnTo>
+                    <a:pt x="6804139" y="1846390"/>
+                  </a:lnTo>
+                  <a:lnTo>
+                    <a:pt x="6732517" y="1841010"/>
+                  </a:lnTo>
+                  <a:lnTo>
+                    <a:pt x="6660894" y="1835424"/>
+                  </a:lnTo>
+                  <a:lnTo>
+                    <a:pt x="6589272" y="1829626"/>
+                  </a:lnTo>
+                  <a:lnTo>
+                    <a:pt x="6517649" y="1823605"/>
+                  </a:lnTo>
+                  <a:lnTo>
+                    <a:pt x="6446027" y="1817355"/>
+                  </a:lnTo>
+                  <a:lnTo>
+                    <a:pt x="6374404" y="1810866"/>
+                  </a:lnTo>
+                  <a:lnTo>
+                    <a:pt x="6302782" y="1804130"/>
+                  </a:lnTo>
+                  <a:lnTo>
+                    <a:pt x="6231159" y="1797136"/>
+                  </a:lnTo>
+                  <a:lnTo>
+                    <a:pt x="6159537" y="1789875"/>
+                  </a:lnTo>
+                  <a:lnTo>
+                    <a:pt x="6087914" y="1782336"/>
+                  </a:lnTo>
+                  <a:lnTo>
+                    <a:pt x="6016292" y="1774510"/>
+                  </a:lnTo>
+                  <a:lnTo>
+                    <a:pt x="5944669" y="1766385"/>
+                  </a:lnTo>
+                  <a:lnTo>
+                    <a:pt x="5873047" y="1757950"/>
+                  </a:lnTo>
+                  <a:lnTo>
+                    <a:pt x="5801424" y="1749192"/>
+                  </a:lnTo>
+                  <a:lnTo>
+                    <a:pt x="5729802" y="1740100"/>
+                  </a:lnTo>
+                  <a:lnTo>
+                    <a:pt x="5658179" y="1730661"/>
+                  </a:lnTo>
+                  <a:lnTo>
+                    <a:pt x="5586557" y="1720861"/>
+                  </a:lnTo>
+                  <a:lnTo>
+                    <a:pt x="5514934" y="1710687"/>
+                  </a:lnTo>
+                  <a:lnTo>
+                    <a:pt x="5443311" y="1700124"/>
+                  </a:lnTo>
+                  <a:lnTo>
+                    <a:pt x="5371689" y="1689158"/>
+                  </a:lnTo>
+                  <a:lnTo>
+                    <a:pt x="5300066" y="1677774"/>
+                  </a:lnTo>
+                  <a:lnTo>
+                    <a:pt x="5228444" y="1665954"/>
+                  </a:lnTo>
+                  <a:lnTo>
+                    <a:pt x="5156821" y="1653683"/>
+                  </a:lnTo>
+                  <a:lnTo>
+                    <a:pt x="5085199" y="1640944"/>
+                  </a:lnTo>
+                  <a:lnTo>
+                    <a:pt x="5013576" y="1627718"/>
+                  </a:lnTo>
+                  <a:lnTo>
+                    <a:pt x="4941954" y="1613987"/>
+                  </a:lnTo>
+                  <a:lnTo>
+                    <a:pt x="4870331" y="1599731"/>
+                  </a:lnTo>
+                  <a:lnTo>
+                    <a:pt x="4798709" y="1584931"/>
+                  </a:lnTo>
+                  <a:lnTo>
+                    <a:pt x="4727086" y="1569566"/>
+                  </a:lnTo>
+                  <a:lnTo>
+                    <a:pt x="4655464" y="1553614"/>
+                  </a:lnTo>
+                  <a:lnTo>
+                    <a:pt x="4583841" y="1537052"/>
+                  </a:lnTo>
+                  <a:lnTo>
+                    <a:pt x="4512219" y="1519859"/>
+                  </a:lnTo>
+                  <a:lnTo>
+                    <a:pt x="4440596" y="1502008"/>
+                  </a:lnTo>
+                  <a:lnTo>
+                    <a:pt x="4368974" y="1483476"/>
+                  </a:lnTo>
+                  <a:lnTo>
+                    <a:pt x="4297351" y="1464237"/>
+                  </a:lnTo>
+                  <a:lnTo>
+                    <a:pt x="4225729" y="1444262"/>
+                  </a:lnTo>
+                  <a:lnTo>
+                    <a:pt x="4154106" y="1423525"/>
+                  </a:lnTo>
+                  <a:lnTo>
+                    <a:pt x="4082483" y="1401995"/>
+                  </a:lnTo>
+                  <a:lnTo>
+                    <a:pt x="4010861" y="1379644"/>
+                  </a:lnTo>
+                  <a:lnTo>
+                    <a:pt x="3939238" y="1356438"/>
+                  </a:lnTo>
+                  <a:lnTo>
+                    <a:pt x="3867616" y="1332347"/>
+                  </a:lnTo>
+                  <a:lnTo>
+                    <a:pt x="3795993" y="1307335"/>
+                  </a:lnTo>
+                  <a:lnTo>
+                    <a:pt x="3724371" y="1281369"/>
+                  </a:lnTo>
+                  <a:lnTo>
+                    <a:pt x="3652748" y="1254410"/>
+                  </a:lnTo>
+                  <a:lnTo>
+                    <a:pt x="3581126" y="1226423"/>
+                  </a:lnTo>
+                  <a:lnTo>
+                    <a:pt x="3509503" y="1197366"/>
+                  </a:lnTo>
+                  <a:lnTo>
+                    <a:pt x="3437881" y="1167199"/>
+                  </a:lnTo>
+                  <a:lnTo>
+                    <a:pt x="3366258" y="1147158"/>
+                  </a:lnTo>
+                  <a:lnTo>
+                    <a:pt x="3294636" y="1131626"/>
+                  </a:lnTo>
+                  <a:lnTo>
+                    <a:pt x="3223013" y="1115807"/>
+                  </a:lnTo>
+                  <a:lnTo>
+                    <a:pt x="3151391" y="1099696"/>
+                  </a:lnTo>
+                  <a:lnTo>
+                    <a:pt x="3079768" y="1083287"/>
+                  </a:lnTo>
+                  <a:lnTo>
+                    <a:pt x="3008146" y="1066575"/>
+                  </a:lnTo>
+                  <a:lnTo>
+                    <a:pt x="2936523" y="1049553"/>
+                  </a:lnTo>
+                  <a:lnTo>
+                    <a:pt x="2864901" y="1032217"/>
+                  </a:lnTo>
+                  <a:lnTo>
+                    <a:pt x="2793278" y="1014561"/>
+                  </a:lnTo>
+                  <a:lnTo>
+                    <a:pt x="2721655" y="996578"/>
+                  </a:lnTo>
+                  <a:lnTo>
+                    <a:pt x="2650033" y="978262"/>
+                  </a:lnTo>
+                  <a:lnTo>
+                    <a:pt x="2578410" y="959608"/>
+                  </a:lnTo>
+                  <a:lnTo>
+                    <a:pt x="2506788" y="940609"/>
+                  </a:lnTo>
+                  <a:lnTo>
+                    <a:pt x="2435165" y="921259"/>
+                  </a:lnTo>
+                  <a:lnTo>
+                    <a:pt x="2363543" y="901551"/>
+                  </a:lnTo>
+                  <a:lnTo>
+                    <a:pt x="2291920" y="881479"/>
+                  </a:lnTo>
+                  <a:lnTo>
+                    <a:pt x="2220298" y="861035"/>
+                  </a:lnTo>
+                  <a:lnTo>
+                    <a:pt x="2148675" y="840214"/>
+                  </a:lnTo>
+                  <a:lnTo>
+                    <a:pt x="2077053" y="819008"/>
+                  </a:lnTo>
+                  <a:lnTo>
+                    <a:pt x="2005430" y="797409"/>
+                  </a:lnTo>
+                  <a:lnTo>
+                    <a:pt x="1933808" y="775412"/>
+                  </a:lnTo>
+                  <a:lnTo>
+                    <a:pt x="1862185" y="753007"/>
+                  </a:lnTo>
+                  <a:lnTo>
+                    <a:pt x="1790563" y="730189"/>
+                  </a:lnTo>
+                  <a:lnTo>
+                    <a:pt x="1718940" y="706948"/>
+                  </a:lnTo>
+                  <a:lnTo>
+                    <a:pt x="1647318" y="683278"/>
+                  </a:lnTo>
+                  <a:lnTo>
+                    <a:pt x="1575695" y="659171"/>
+                  </a:lnTo>
+                  <a:lnTo>
+                    <a:pt x="1504073" y="634617"/>
+                  </a:lnTo>
+                  <a:lnTo>
+                    <a:pt x="1432450" y="609610"/>
+                  </a:lnTo>
+                  <a:lnTo>
+                    <a:pt x="1360827" y="584140"/>
+                  </a:lnTo>
+                  <a:lnTo>
+                    <a:pt x="1289205" y="558200"/>
+                  </a:lnTo>
+                  <a:lnTo>
+                    <a:pt x="1217582" y="531780"/>
+                  </a:lnTo>
+                  <a:lnTo>
+                    <a:pt x="1145960" y="504871"/>
+                  </a:lnTo>
+                  <a:lnTo>
+                    <a:pt x="1074337" y="477465"/>
+                  </a:lnTo>
+                  <a:lnTo>
+                    <a:pt x="1002715" y="449553"/>
+                  </a:lnTo>
+                  <a:lnTo>
+                    <a:pt x="931092" y="421124"/>
+                  </a:lnTo>
+                  <a:lnTo>
+                    <a:pt x="859470" y="392170"/>
+                  </a:lnTo>
+                  <a:lnTo>
+                    <a:pt x="787847" y="362680"/>
+                  </a:lnTo>
+                  <a:lnTo>
+                    <a:pt x="716225" y="332645"/>
+                  </a:lnTo>
+                  <a:lnTo>
+                    <a:pt x="644602" y="302055"/>
+                  </a:lnTo>
+                  <a:lnTo>
+                    <a:pt x="572980" y="270900"/>
+                  </a:lnTo>
+                  <a:lnTo>
+                    <a:pt x="501357" y="239168"/>
+                  </a:lnTo>
+                  <a:lnTo>
+                    <a:pt x="429735" y="206850"/>
+                  </a:lnTo>
+                  <a:lnTo>
+                    <a:pt x="358112" y="173934"/>
+                  </a:lnTo>
+                  <a:lnTo>
+                    <a:pt x="286490" y="140410"/>
+                  </a:lnTo>
+                  <a:lnTo>
+                    <a:pt x="214867" y="106266"/>
+                  </a:lnTo>
+                  <a:lnTo>
+                    <a:pt x="143245" y="71491"/>
+                  </a:lnTo>
+                  <a:lnTo>
+                    <a:pt x="71622" y="36072"/>
                   </a:lnTo>
                   <a:lnTo>
                     <a:pt x="0" y="0"/>
@@ -4659,312 +4659,312 @@
           </p:nvSpPr>
           <p:spPr>
             <a:xfrm>
-              <a:off x="1172049" y="2463275"/>
-              <a:ext cx="7090630" cy="2892681"/>
+              <a:off x="1172049" y="2418914"/>
+              <a:ext cx="7090630" cy="2940102"/>
             </a:xfrm>
             <a:custGeom>
               <a:avLst/>
               <a:pathLst>
-                <a:path w="7090630" h="2892681">
+                <a:path w="7090630" h="2940102">
                   <a:moveTo>
                     <a:pt x="0" y="0"/>
                   </a:moveTo>
                   <a:lnTo>
-                    <a:pt x="71622" y="84227"/>
-                  </a:lnTo>
-                  <a:lnTo>
-                    <a:pt x="143245" y="166162"/>
-                  </a:lnTo>
-                  <a:lnTo>
-                    <a:pt x="214867" y="245866"/>
-                  </a:lnTo>
-                  <a:lnTo>
-                    <a:pt x="286490" y="323400"/>
-                  </a:lnTo>
-                  <a:lnTo>
-                    <a:pt x="358112" y="398824"/>
-                  </a:lnTo>
-                  <a:lnTo>
-                    <a:pt x="429735" y="472194"/>
-                  </a:lnTo>
-                  <a:lnTo>
-                    <a:pt x="501357" y="543567"/>
-                  </a:lnTo>
-                  <a:lnTo>
-                    <a:pt x="572980" y="612997"/>
-                  </a:lnTo>
-                  <a:lnTo>
-                    <a:pt x="644602" y="680537"/>
-                  </a:lnTo>
-                  <a:lnTo>
-                    <a:pt x="716225" y="746239"/>
-                  </a:lnTo>
-                  <a:lnTo>
-                    <a:pt x="787847" y="810151"/>
-                  </a:lnTo>
-                  <a:lnTo>
-                    <a:pt x="859470" y="872324"/>
-                  </a:lnTo>
-                  <a:lnTo>
-                    <a:pt x="931092" y="932804"/>
-                  </a:lnTo>
-                  <a:lnTo>
-                    <a:pt x="1002715" y="991638"/>
-                  </a:lnTo>
-                  <a:lnTo>
-                    <a:pt x="1074337" y="1048870"/>
-                  </a:lnTo>
-                  <a:lnTo>
-                    <a:pt x="1145960" y="1104544"/>
-                  </a:lnTo>
-                  <a:lnTo>
-                    <a:pt x="1217582" y="1158703"/>
-                  </a:lnTo>
-                  <a:lnTo>
-                    <a:pt x="1289205" y="1211387"/>
-                  </a:lnTo>
-                  <a:lnTo>
-                    <a:pt x="1360827" y="1262637"/>
-                  </a:lnTo>
-                  <a:lnTo>
-                    <a:pt x="1432450" y="1312491"/>
-                  </a:lnTo>
-                  <a:lnTo>
-                    <a:pt x="1504073" y="1360989"/>
-                  </a:lnTo>
-                  <a:lnTo>
-                    <a:pt x="1575695" y="1408166"/>
-                  </a:lnTo>
-                  <a:lnTo>
-                    <a:pt x="1647318" y="1454059"/>
-                  </a:lnTo>
-                  <a:lnTo>
-                    <a:pt x="1718940" y="1498703"/>
-                  </a:lnTo>
-                  <a:lnTo>
-                    <a:pt x="1790563" y="1542131"/>
-                  </a:lnTo>
-                  <a:lnTo>
-                    <a:pt x="1862185" y="1584377"/>
-                  </a:lnTo>
-                  <a:lnTo>
-                    <a:pt x="1933808" y="1625473"/>
-                  </a:lnTo>
-                  <a:lnTo>
-                    <a:pt x="2005430" y="1665450"/>
-                  </a:lnTo>
-                  <a:lnTo>
-                    <a:pt x="2077053" y="1704339"/>
-                  </a:lnTo>
-                  <a:lnTo>
-                    <a:pt x="2148675" y="1742169"/>
-                  </a:lnTo>
-                  <a:lnTo>
-                    <a:pt x="2220298" y="1778970"/>
-                  </a:lnTo>
-                  <a:lnTo>
-                    <a:pt x="2291920" y="1814768"/>
-                  </a:lnTo>
-                  <a:lnTo>
-                    <a:pt x="2363543" y="1849592"/>
-                  </a:lnTo>
-                  <a:lnTo>
-                    <a:pt x="2435165" y="1883468"/>
-                  </a:lnTo>
-                  <a:lnTo>
-                    <a:pt x="2506788" y="1916422"/>
-                  </a:lnTo>
-                  <a:lnTo>
-                    <a:pt x="2578410" y="1948478"/>
-                  </a:lnTo>
-                  <a:lnTo>
-                    <a:pt x="2650033" y="1979662"/>
-                  </a:lnTo>
-                  <a:lnTo>
-                    <a:pt x="2721655" y="2009997"/>
-                  </a:lnTo>
-                  <a:lnTo>
-                    <a:pt x="2793278" y="2039507"/>
-                  </a:lnTo>
-                  <a:lnTo>
-                    <a:pt x="2864901" y="2068212"/>
-                  </a:lnTo>
-                  <a:lnTo>
-                    <a:pt x="2936523" y="2096137"/>
-                  </a:lnTo>
-                  <a:lnTo>
-                    <a:pt x="3008146" y="2123301"/>
-                  </a:lnTo>
-                  <a:lnTo>
-                    <a:pt x="3079768" y="2149726"/>
-                  </a:lnTo>
-                  <a:lnTo>
-                    <a:pt x="3151391" y="2175431"/>
-                  </a:lnTo>
-                  <a:lnTo>
-                    <a:pt x="3223013" y="2200437"/>
-                  </a:lnTo>
-                  <a:lnTo>
-                    <a:pt x="3294636" y="2224762"/>
-                  </a:lnTo>
-                  <a:lnTo>
-                    <a:pt x="3366258" y="2248424"/>
-                  </a:lnTo>
-                  <a:lnTo>
-                    <a:pt x="3437881" y="2271443"/>
-                  </a:lnTo>
-                  <a:lnTo>
-                    <a:pt x="3509503" y="2293835"/>
-                  </a:lnTo>
-                  <a:lnTo>
-                    <a:pt x="3581126" y="2315617"/>
-                  </a:lnTo>
-                  <a:lnTo>
-                    <a:pt x="3652748" y="2336806"/>
-                  </a:lnTo>
-                  <a:lnTo>
-                    <a:pt x="3724371" y="2357419"/>
-                  </a:lnTo>
-                  <a:lnTo>
-                    <a:pt x="3795993" y="2377470"/>
-                  </a:lnTo>
-                  <a:lnTo>
-                    <a:pt x="3867616" y="2396976"/>
-                  </a:lnTo>
-                  <a:lnTo>
-                    <a:pt x="3939238" y="2415950"/>
-                  </a:lnTo>
-                  <a:lnTo>
-                    <a:pt x="4010861" y="2434408"/>
-                  </a:lnTo>
-                  <a:lnTo>
-                    <a:pt x="4082483" y="2452363"/>
-                  </a:lnTo>
-                  <a:lnTo>
-                    <a:pt x="4154106" y="2469830"/>
-                  </a:lnTo>
-                  <a:lnTo>
-                    <a:pt x="4225729" y="2486821"/>
-                  </a:lnTo>
-                  <a:lnTo>
-                    <a:pt x="4297351" y="2503350"/>
-                  </a:lnTo>
-                  <a:lnTo>
-                    <a:pt x="4368974" y="2519428"/>
-                  </a:lnTo>
-                  <a:lnTo>
-                    <a:pt x="4440596" y="2535069"/>
-                  </a:lnTo>
-                  <a:lnTo>
-                    <a:pt x="4512219" y="2550284"/>
-                  </a:lnTo>
-                  <a:lnTo>
-                    <a:pt x="4583841" y="2565085"/>
-                  </a:lnTo>
-                  <a:lnTo>
-                    <a:pt x="4655464" y="2579483"/>
-                  </a:lnTo>
-                  <a:lnTo>
-                    <a:pt x="4727086" y="2593489"/>
-                  </a:lnTo>
-                  <a:lnTo>
-                    <a:pt x="4798709" y="2607114"/>
-                  </a:lnTo>
-                  <a:lnTo>
-                    <a:pt x="4870331" y="2620368"/>
-                  </a:lnTo>
-                  <a:lnTo>
-                    <a:pt x="4941954" y="2633261"/>
-                  </a:lnTo>
-                  <a:lnTo>
-                    <a:pt x="5013576" y="2645803"/>
-                  </a:lnTo>
-                  <a:lnTo>
-                    <a:pt x="5085199" y="2658004"/>
-                  </a:lnTo>
-                  <a:lnTo>
-                    <a:pt x="5156821" y="2669872"/>
-                  </a:lnTo>
-                  <a:lnTo>
-                    <a:pt x="5228444" y="2681418"/>
-                  </a:lnTo>
-                  <a:lnTo>
-                    <a:pt x="5300066" y="2692649"/>
-                  </a:lnTo>
-                  <a:lnTo>
-                    <a:pt x="5371689" y="2703574"/>
-                  </a:lnTo>
-                  <a:lnTo>
-                    <a:pt x="5443311" y="2714202"/>
-                  </a:lnTo>
-                  <a:lnTo>
-                    <a:pt x="5514934" y="2724540"/>
-                  </a:lnTo>
-                  <a:lnTo>
-                    <a:pt x="5586557" y="2734598"/>
-                  </a:lnTo>
-                  <a:lnTo>
-                    <a:pt x="5658179" y="2744381"/>
-                  </a:lnTo>
-                  <a:lnTo>
-                    <a:pt x="5729802" y="2753898"/>
-                  </a:lnTo>
-                  <a:lnTo>
-                    <a:pt x="5801424" y="2763156"/>
-                  </a:lnTo>
-                  <a:lnTo>
-                    <a:pt x="5873047" y="2772162"/>
-                  </a:lnTo>
-                  <a:lnTo>
-                    <a:pt x="5944669" y="2780922"/>
-                  </a:lnTo>
-                  <a:lnTo>
-                    <a:pt x="6016292" y="2789445"/>
-                  </a:lnTo>
-                  <a:lnTo>
-                    <a:pt x="6087914" y="2797735"/>
-                  </a:lnTo>
-                  <a:lnTo>
-                    <a:pt x="6159537" y="2805800"/>
-                  </a:lnTo>
-                  <a:lnTo>
-                    <a:pt x="6231159" y="2813645"/>
-                  </a:lnTo>
-                  <a:lnTo>
-                    <a:pt x="6302782" y="2821276"/>
-                  </a:lnTo>
-                  <a:lnTo>
-                    <a:pt x="6374404" y="2828700"/>
-                  </a:lnTo>
-                  <a:lnTo>
-                    <a:pt x="6446027" y="2835921"/>
-                  </a:lnTo>
-                  <a:lnTo>
-                    <a:pt x="6517649" y="2842946"/>
-                  </a:lnTo>
-                  <a:lnTo>
-                    <a:pt x="6589272" y="2849780"/>
-                  </a:lnTo>
-                  <a:lnTo>
-                    <a:pt x="6660894" y="2856428"/>
-                  </a:lnTo>
-                  <a:lnTo>
-                    <a:pt x="6732517" y="2862894"/>
-                  </a:lnTo>
-                  <a:lnTo>
-                    <a:pt x="6804139" y="2869185"/>
-                  </a:lnTo>
-                  <a:lnTo>
-                    <a:pt x="6875762" y="2875305"/>
-                  </a:lnTo>
-                  <a:lnTo>
-                    <a:pt x="6947385" y="2881258"/>
-                  </a:lnTo>
-                  <a:lnTo>
-                    <a:pt x="7019007" y="2887048"/>
-                  </a:lnTo>
-                  <a:lnTo>
-                    <a:pt x="7090630" y="2892681"/>
+                    <a:pt x="71622" y="86346"/>
+                  </a:lnTo>
+                  <a:lnTo>
+                    <a:pt x="143245" y="170317"/>
+                  </a:lnTo>
+                  <a:lnTo>
+                    <a:pt x="214867" y="251977"/>
+                  </a:lnTo>
+                  <a:lnTo>
+                    <a:pt x="286490" y="331390"/>
+                  </a:lnTo>
+                  <a:lnTo>
+                    <a:pt x="358112" y="408619"/>
+                  </a:lnTo>
+                  <a:lnTo>
+                    <a:pt x="429735" y="483723"/>
+                  </a:lnTo>
+                  <a:lnTo>
+                    <a:pt x="501357" y="556760"/>
+                  </a:lnTo>
+                  <a:lnTo>
+                    <a:pt x="572980" y="627788"/>
+                  </a:lnTo>
+                  <a:lnTo>
+                    <a:pt x="644602" y="696862"/>
+                  </a:lnTo>
+                  <a:lnTo>
+                    <a:pt x="716225" y="764035"/>
+                  </a:lnTo>
+                  <a:lnTo>
+                    <a:pt x="787847" y="829361"/>
+                  </a:lnTo>
+                  <a:lnTo>
+                    <a:pt x="859470" y="892888"/>
+                  </a:lnTo>
+                  <a:lnTo>
+                    <a:pt x="931092" y="954668"/>
+                  </a:lnTo>
+                  <a:lnTo>
+                    <a:pt x="1002715" y="1014748"/>
+                  </a:lnTo>
+                  <a:lnTo>
+                    <a:pt x="1074337" y="1073176"/>
+                  </a:lnTo>
+                  <a:lnTo>
+                    <a:pt x="1145960" y="1129995"/>
+                  </a:lnTo>
+                  <a:lnTo>
+                    <a:pt x="1217582" y="1185252"/>
+                  </a:lnTo>
+                  <a:lnTo>
+                    <a:pt x="1289205" y="1238988"/>
+                  </a:lnTo>
+                  <a:lnTo>
+                    <a:pt x="1360827" y="1291245"/>
+                  </a:lnTo>
+                  <a:lnTo>
+                    <a:pt x="1432450" y="1342065"/>
+                  </a:lnTo>
+                  <a:lnTo>
+                    <a:pt x="1504073" y="1391486"/>
+                  </a:lnTo>
+                  <a:lnTo>
+                    <a:pt x="1575695" y="1439548"/>
+                  </a:lnTo>
+                  <a:lnTo>
+                    <a:pt x="1647318" y="1486288"/>
+                  </a:lnTo>
+                  <a:lnTo>
+                    <a:pt x="1718940" y="1531741"/>
+                  </a:lnTo>
+                  <a:lnTo>
+                    <a:pt x="1790563" y="1575944"/>
+                  </a:lnTo>
+                  <a:lnTo>
+                    <a:pt x="1862185" y="1618931"/>
+                  </a:lnTo>
+                  <a:lnTo>
+                    <a:pt x="1933808" y="1660735"/>
+                  </a:lnTo>
+                  <a:lnTo>
+                    <a:pt x="2005430" y="1701389"/>
+                  </a:lnTo>
+                  <a:lnTo>
+                    <a:pt x="2077053" y="1740924"/>
+                  </a:lnTo>
+                  <a:lnTo>
+                    <a:pt x="2148675" y="1779372"/>
+                  </a:lnTo>
+                  <a:lnTo>
+                    <a:pt x="2220298" y="1816761"/>
+                  </a:lnTo>
+                  <a:lnTo>
+                    <a:pt x="2291920" y="1853122"/>
+                  </a:lnTo>
+                  <a:lnTo>
+                    <a:pt x="2363543" y="1888483"/>
+                  </a:lnTo>
+                  <a:lnTo>
+                    <a:pt x="2435165" y="1922871"/>
+                  </a:lnTo>
+                  <a:lnTo>
+                    <a:pt x="2506788" y="1956312"/>
+                  </a:lnTo>
+                  <a:lnTo>
+                    <a:pt x="2578410" y="1988834"/>
+                  </a:lnTo>
+                  <a:lnTo>
+                    <a:pt x="2650033" y="2020460"/>
+                  </a:lnTo>
+                  <a:lnTo>
+                    <a:pt x="2721655" y="2051217"/>
+                  </a:lnTo>
+                  <a:lnTo>
+                    <a:pt x="2793278" y="2081127"/>
+                  </a:lnTo>
+                  <a:lnTo>
+                    <a:pt x="2864901" y="2110215"/>
+                  </a:lnTo>
+                  <a:lnTo>
+                    <a:pt x="2936523" y="2138502"/>
+                  </a:lnTo>
+                  <a:lnTo>
+                    <a:pt x="3008146" y="2166011"/>
+                  </a:lnTo>
+                  <a:lnTo>
+                    <a:pt x="3079768" y="2192763"/>
+                  </a:lnTo>
+                  <a:lnTo>
+                    <a:pt x="3151391" y="2218779"/>
+                  </a:lnTo>
+                  <a:lnTo>
+                    <a:pt x="3223013" y="2244079"/>
+                  </a:lnTo>
+                  <a:lnTo>
+                    <a:pt x="3294636" y="2268683"/>
+                  </a:lnTo>
+                  <a:lnTo>
+                    <a:pt x="3366258" y="2292610"/>
+                  </a:lnTo>
+                  <a:lnTo>
+                    <a:pt x="3437881" y="2315879"/>
+                  </a:lnTo>
+                  <a:lnTo>
+                    <a:pt x="3509503" y="2338507"/>
+                  </a:lnTo>
+                  <a:lnTo>
+                    <a:pt x="3581126" y="2360513"/>
+                  </a:lnTo>
+                  <a:lnTo>
+                    <a:pt x="3652748" y="2381914"/>
+                  </a:lnTo>
+                  <a:lnTo>
+                    <a:pt x="3724371" y="2402726"/>
+                  </a:lnTo>
+                  <a:lnTo>
+                    <a:pt x="3795993" y="2422965"/>
+                  </a:lnTo>
+                  <a:lnTo>
+                    <a:pt x="3867616" y="2442647"/>
+                  </a:lnTo>
+                  <a:lnTo>
+                    <a:pt x="3939238" y="2461788"/>
+                  </a:lnTo>
+                  <a:lnTo>
+                    <a:pt x="4010861" y="2480402"/>
+                  </a:lnTo>
+                  <a:lnTo>
+                    <a:pt x="4082483" y="2498504"/>
+                  </a:lnTo>
+                  <a:lnTo>
+                    <a:pt x="4154106" y="2516108"/>
+                  </a:lnTo>
+                  <a:lnTo>
+                    <a:pt x="4225729" y="2533228"/>
+                  </a:lnTo>
+                  <a:lnTo>
+                    <a:pt x="4297351" y="2549876"/>
+                  </a:lnTo>
+                  <a:lnTo>
+                    <a:pt x="4368974" y="2566067"/>
+                  </a:lnTo>
+                  <a:lnTo>
+                    <a:pt x="4440596" y="2581812"/>
+                  </a:lnTo>
+                  <a:lnTo>
+                    <a:pt x="4512219" y="2597124"/>
+                  </a:lnTo>
+                  <a:lnTo>
+                    <a:pt x="4583841" y="2612014"/>
+                  </a:lnTo>
+                  <a:lnTo>
+                    <a:pt x="4655464" y="2626495"/>
+                  </a:lnTo>
+                  <a:lnTo>
+                    <a:pt x="4727086" y="2640578"/>
+                  </a:lnTo>
+                  <a:lnTo>
+                    <a:pt x="4798709" y="2654273"/>
+                  </a:lnTo>
+                  <a:lnTo>
+                    <a:pt x="4870331" y="2667591"/>
+                  </a:lnTo>
+                  <a:lnTo>
+                    <a:pt x="4941954" y="2680543"/>
+                  </a:lnTo>
+                  <a:lnTo>
+                    <a:pt x="5013576" y="2693138"/>
+                  </a:lnTo>
+                  <a:lnTo>
+                    <a:pt x="5085199" y="2705387"/>
+                  </a:lnTo>
+                  <a:lnTo>
+                    <a:pt x="5156821" y="2717299"/>
+                  </a:lnTo>
+                  <a:lnTo>
+                    <a:pt x="5228444" y="2728883"/>
+                  </a:lnTo>
+                  <a:lnTo>
+                    <a:pt x="5300066" y="2740148"/>
+                  </a:lnTo>
+                  <a:lnTo>
+                    <a:pt x="5371689" y="2751104"/>
+                  </a:lnTo>
+                  <a:lnTo>
+                    <a:pt x="5443311" y="2761758"/>
+                  </a:lnTo>
+                  <a:lnTo>
+                    <a:pt x="5514934" y="2772119"/>
+                  </a:lnTo>
+                  <a:lnTo>
+                    <a:pt x="5586557" y="2782195"/>
+                  </a:lnTo>
+                  <a:lnTo>
+                    <a:pt x="5658179" y="2791993"/>
+                  </a:lnTo>
+                  <a:lnTo>
+                    <a:pt x="5729802" y="2801522"/>
+                  </a:lnTo>
+                  <a:lnTo>
+                    <a:pt x="5801424" y="2810789"/>
+                  </a:lnTo>
+                  <a:lnTo>
+                    <a:pt x="5873047" y="2819801"/>
+                  </a:lnTo>
+                  <a:lnTo>
+                    <a:pt x="5944669" y="2828565"/>
+                  </a:lnTo>
+                  <a:lnTo>
+                    <a:pt x="6016292" y="2837088"/>
+                  </a:lnTo>
+                  <a:lnTo>
+                    <a:pt x="6087914" y="2845376"/>
+                  </a:lnTo>
+                  <a:lnTo>
+                    <a:pt x="6159537" y="2853437"/>
+                  </a:lnTo>
+                  <a:lnTo>
+                    <a:pt x="6231159" y="2861275"/>
+                  </a:lnTo>
+                  <a:lnTo>
+                    <a:pt x="6302782" y="2868898"/>
+                  </a:lnTo>
+                  <a:lnTo>
+                    <a:pt x="6374404" y="2876311"/>
+                  </a:lnTo>
+                  <a:lnTo>
+                    <a:pt x="6446027" y="2883520"/>
+                  </a:lnTo>
+                  <a:lnTo>
+                    <a:pt x="6517649" y="2890531"/>
+                  </a:lnTo>
+                  <a:lnTo>
+                    <a:pt x="6589272" y="2897349"/>
+                  </a:lnTo>
+                  <a:lnTo>
+                    <a:pt x="6660894" y="2903980"/>
+                  </a:lnTo>
+                  <a:lnTo>
+                    <a:pt x="6732517" y="2910427"/>
+                  </a:lnTo>
+                  <a:lnTo>
+                    <a:pt x="6804139" y="2916698"/>
+                  </a:lnTo>
+                  <a:lnTo>
+                    <a:pt x="6875762" y="2922796"/>
+                  </a:lnTo>
+                  <a:lnTo>
+                    <a:pt x="6947385" y="2928726"/>
+                  </a:lnTo>
+                  <a:lnTo>
+                    <a:pt x="7019007" y="2934493"/>
+                  </a:lnTo>
+                  <a:lnTo>
+                    <a:pt x="7090630" y="2940102"/>
                   </a:lnTo>
                 </a:path>
               </a:pathLst>
@@ -5848,7 +5848,7 @@
                   <a:latin typeface="Helvetica"/>
                   <a:cs typeface="Helvetica"/>
                 </a:rPr>
-                <a:t>subHR per 10 % decline: 1.39 (1.24-1.56), p_Bonf = &lt;0.001 (n = 6)  |  per IQR decline (Δ = 29.3 %): 2.64 (1.88-3.70)  |  IQR: [-14.6, 14.7] %</a:t>
+                <a:t>subHR per 10 % decline: 1.40 (1.25-1.57), p_Bonf = &lt;0.001 (n = 6)  |  per IQR decline (Δ = 29.3 %): 2.67 (1.90-3.74)  |  IQR: [-14.6, 14.7] %</a:t>
               </a:r>
             </a:p>
           </p:txBody>
